--- a/에너지경제학/자원에너지경제학_Chapter_5 (석탄).pptx
+++ b/에너지경제학/자원에너지경제학_Chapter_5 (석탄).pptx
@@ -270,7 +270,7 @@
           <a:p>
             <a:fld id="{4A5E00EF-AEA4-43E2-9451-8F9C59A39471}" type="datetimeFigureOut">
               <a:rPr lang="ko-KR" altLang="en-US" smtClean="0"/>
-              <a:t>2026-08-28</a:t>
+              <a:t>2026-09-18</a:t>
             </a:fld>
             <a:endParaRPr lang="ko-KR" altLang="en-US"/>
           </a:p>
@@ -692,7 +692,7 @@
           <a:p>
             <a:fld id="{CD32C56F-BD27-4999-9E6D-D4EACE3DA9F4}" type="datetime1">
               <a:rPr lang="ko-KR" altLang="en-US" smtClean="0"/>
-              <a:t>2026-08-28</a:t>
+              <a:t>2026-09-18</a:t>
             </a:fld>
             <a:endParaRPr lang="ko-KR" altLang="en-US"/>
           </a:p>
@@ -906,7 +906,7 @@
           <a:p>
             <a:fld id="{8EF4A19C-72C8-45CA-8E3F-68A7FA345D6C}" type="datetime1">
               <a:rPr lang="ko-KR" altLang="en-US" smtClean="0"/>
-              <a:t>2026-08-28</a:t>
+              <a:t>2026-09-18</a:t>
             </a:fld>
             <a:endParaRPr lang="ko-KR" altLang="en-US"/>
           </a:p>
@@ -1130,7 +1130,7 @@
           <a:p>
             <a:fld id="{56A175B2-010B-4341-954C-5F8F5C70B124}" type="datetime1">
               <a:rPr lang="ko-KR" altLang="en-US" smtClean="0"/>
-              <a:t>2026-08-28</a:t>
+              <a:t>2026-09-18</a:t>
             </a:fld>
             <a:endParaRPr lang="ko-KR" altLang="en-US"/>
           </a:p>
@@ -1344,7 +1344,7 @@
           <a:p>
             <a:fld id="{16B83F9E-22C9-45CA-9E85-070F1D3EF530}" type="datetime1">
               <a:rPr lang="ko-KR" altLang="en-US" smtClean="0"/>
-              <a:t>2026-08-28</a:t>
+              <a:t>2026-09-18</a:t>
             </a:fld>
             <a:endParaRPr lang="ko-KR" altLang="en-US"/>
           </a:p>
@@ -1635,7 +1635,7 @@
           <a:p>
             <a:fld id="{03278F45-FB3C-4C4D-B89A-7BC3F5F229F6}" type="datetime1">
               <a:rPr lang="ko-KR" altLang="en-US" smtClean="0"/>
-              <a:t>2026-08-28</a:t>
+              <a:t>2026-09-18</a:t>
             </a:fld>
             <a:endParaRPr lang="ko-KR" altLang="en-US"/>
           </a:p>
@@ -2028,7 +2028,7 @@
           <a:p>
             <a:fld id="{38FDAC3C-35A6-415C-9F03-738A6AC328B1}" type="datetime1">
               <a:rPr lang="ko-KR" altLang="en-US" smtClean="0"/>
-              <a:t>2026-08-28</a:t>
+              <a:t>2026-09-18</a:t>
             </a:fld>
             <a:endParaRPr lang="ko-KR" altLang="en-US"/>
           </a:p>
@@ -3622,7 +3622,7 @@
           <a:p>
             <a:fld id="{507A0DF1-AEE6-4B0D-89D2-351E7B3EF65C}" type="datetime1">
               <a:rPr lang="ko-KR" altLang="en-US" smtClean="0"/>
-              <a:t>2026-08-28</a:t>
+              <a:t>2026-09-18</a:t>
             </a:fld>
             <a:endParaRPr lang="ko-KR" altLang="en-US"/>
           </a:p>
@@ -4050,7 +4050,7 @@
           <a:p>
             <a:fld id="{CA93B8C9-630F-4D57-944D-04FD37CECCD3}" type="datetime1">
               <a:rPr lang="ko-KR" altLang="en-US" smtClean="0"/>
-              <a:t>2026-08-28</a:t>
+              <a:t>2026-09-18</a:t>
             </a:fld>
             <a:endParaRPr lang="ko-KR" altLang="en-US"/>
           </a:p>
@@ -4207,7 +4207,7 @@
           <a:p>
             <a:fld id="{E986165A-AC43-4902-9541-874ECD310BA3}" type="datetime1">
               <a:rPr lang="ko-KR" altLang="en-US" smtClean="0"/>
-              <a:t>2026-08-28</a:t>
+              <a:t>2026-09-18</a:t>
             </a:fld>
             <a:endParaRPr lang="ko-KR" altLang="en-US"/>
           </a:p>
@@ -4534,7 +4534,7 @@
           <a:p>
             <a:fld id="{47E6EE6D-2B0E-43A9-87A2-7354CDB998F4}" type="datetime1">
               <a:rPr lang="ko-KR" altLang="en-US" smtClean="0"/>
-              <a:t>2026-08-28</a:t>
+              <a:t>2026-09-18</a:t>
             </a:fld>
             <a:endParaRPr lang="ko-KR" altLang="en-US"/>
           </a:p>
@@ -4838,7 +4838,7 @@
           <a:p>
             <a:fld id="{5CC5944E-0BC8-4FAA-9F94-6B4B05834E10}" type="datetime1">
               <a:rPr lang="ko-KR" altLang="en-US" smtClean="0"/>
-              <a:t>2026-08-28</a:t>
+              <a:t>2026-09-18</a:t>
             </a:fld>
             <a:endParaRPr lang="ko-KR" altLang="en-US"/>
           </a:p>
@@ -14304,12 +14304,8 @@
               <a:rPr lang="en-US" altLang="ko-KR" sz="4000" b="1" i="0" spc="150" dirty="0"/>
             </a:br>
             <a:r>
-              <a:rPr lang="ko-KR" altLang="en-US" sz="4000" b="1" i="0" spc="150" dirty="0" err="1"/>
-              <a:t>석탄채굴과정의</a:t>
-            </a:r>
-            <a:r>
               <a:rPr lang="ko-KR" altLang="en-US" sz="4000" b="1" i="0" spc="150" dirty="0"/>
-              <a:t> 사회적 환경적 문제</a:t>
+              <a:t>석탄채굴 과정의 사회적 환경적 문제</a:t>
             </a:r>
             <a:endParaRPr lang="ko-KR" altLang="en-US" sz="3600" i="0" spc="150" dirty="0"/>
           </a:p>

--- a/에너지경제학/자원에너지경제학_Chapter_5 (석탄).pptx
+++ b/에너지경제학/자원에너지경제학_Chapter_5 (석탄).pptx
@@ -5,7 +5,7 @@
     <p:sldMasterId id="2147483648" r:id="rId1"/>
   </p:sldMasterIdLst>
   <p:notesMasterIdLst>
-    <p:notesMasterId r:id="rId54"/>
+    <p:notesMasterId r:id="rId55"/>
   </p:notesMasterIdLst>
   <p:sldIdLst>
     <p:sldId id="375" r:id="rId2"/>
@@ -43,23 +43,24 @@
     <p:sldId id="605" r:id="rId34"/>
     <p:sldId id="632" r:id="rId35"/>
     <p:sldId id="633" r:id="rId36"/>
-    <p:sldId id="634" r:id="rId37"/>
-    <p:sldId id="635" r:id="rId38"/>
-    <p:sldId id="636" r:id="rId39"/>
-    <p:sldId id="637" r:id="rId40"/>
-    <p:sldId id="638" r:id="rId41"/>
-    <p:sldId id="639" r:id="rId42"/>
-    <p:sldId id="640" r:id="rId43"/>
-    <p:sldId id="641" r:id="rId44"/>
-    <p:sldId id="642" r:id="rId45"/>
-    <p:sldId id="607" r:id="rId46"/>
-    <p:sldId id="643" r:id="rId47"/>
-    <p:sldId id="644" r:id="rId48"/>
-    <p:sldId id="645" r:id="rId49"/>
-    <p:sldId id="608" r:id="rId50"/>
-    <p:sldId id="646" r:id="rId51"/>
-    <p:sldId id="647" r:id="rId52"/>
-    <p:sldId id="598" r:id="rId53"/>
+    <p:sldId id="648" r:id="rId37"/>
+    <p:sldId id="634" r:id="rId38"/>
+    <p:sldId id="635" r:id="rId39"/>
+    <p:sldId id="636" r:id="rId40"/>
+    <p:sldId id="637" r:id="rId41"/>
+    <p:sldId id="638" r:id="rId42"/>
+    <p:sldId id="639" r:id="rId43"/>
+    <p:sldId id="640" r:id="rId44"/>
+    <p:sldId id="641" r:id="rId45"/>
+    <p:sldId id="642" r:id="rId46"/>
+    <p:sldId id="607" r:id="rId47"/>
+    <p:sldId id="643" r:id="rId48"/>
+    <p:sldId id="644" r:id="rId49"/>
+    <p:sldId id="645" r:id="rId50"/>
+    <p:sldId id="608" r:id="rId51"/>
+    <p:sldId id="646" r:id="rId52"/>
+    <p:sldId id="647" r:id="rId53"/>
+    <p:sldId id="598" r:id="rId54"/>
   </p:sldIdLst>
   <p:sldSz cx="12192000" cy="6858000"/>
   <p:notesSz cx="6858000" cy="9144000"/>
@@ -270,7 +271,7 @@
           <a:p>
             <a:fld id="{4A5E00EF-AEA4-43E2-9451-8F9C59A39471}" type="datetimeFigureOut">
               <a:rPr lang="ko-KR" altLang="en-US" smtClean="0"/>
-              <a:t>2026-09-18</a:t>
+              <a:t>2026-09-23</a:t>
             </a:fld>
             <a:endParaRPr lang="ko-KR" altLang="en-US"/>
           </a:p>
@@ -692,7 +693,7 @@
           <a:p>
             <a:fld id="{CD32C56F-BD27-4999-9E6D-D4EACE3DA9F4}" type="datetime1">
               <a:rPr lang="ko-KR" altLang="en-US" smtClean="0"/>
-              <a:t>2026-09-18</a:t>
+              <a:t>2026-09-23</a:t>
             </a:fld>
             <a:endParaRPr lang="ko-KR" altLang="en-US"/>
           </a:p>
@@ -906,7 +907,7 @@
           <a:p>
             <a:fld id="{8EF4A19C-72C8-45CA-8E3F-68A7FA345D6C}" type="datetime1">
               <a:rPr lang="ko-KR" altLang="en-US" smtClean="0"/>
-              <a:t>2026-09-18</a:t>
+              <a:t>2026-09-23</a:t>
             </a:fld>
             <a:endParaRPr lang="ko-KR" altLang="en-US"/>
           </a:p>
@@ -1130,7 +1131,7 @@
           <a:p>
             <a:fld id="{56A175B2-010B-4341-954C-5F8F5C70B124}" type="datetime1">
               <a:rPr lang="ko-KR" altLang="en-US" smtClean="0"/>
-              <a:t>2026-09-18</a:t>
+              <a:t>2026-09-23</a:t>
             </a:fld>
             <a:endParaRPr lang="ko-KR" altLang="en-US"/>
           </a:p>
@@ -1344,7 +1345,7 @@
           <a:p>
             <a:fld id="{16B83F9E-22C9-45CA-9E85-070F1D3EF530}" type="datetime1">
               <a:rPr lang="ko-KR" altLang="en-US" smtClean="0"/>
-              <a:t>2026-09-18</a:t>
+              <a:t>2026-09-23</a:t>
             </a:fld>
             <a:endParaRPr lang="ko-KR" altLang="en-US"/>
           </a:p>
@@ -1635,7 +1636,7 @@
           <a:p>
             <a:fld id="{03278F45-FB3C-4C4D-B89A-7BC3F5F229F6}" type="datetime1">
               <a:rPr lang="ko-KR" altLang="en-US" smtClean="0"/>
-              <a:t>2026-09-18</a:t>
+              <a:t>2026-09-23</a:t>
             </a:fld>
             <a:endParaRPr lang="ko-KR" altLang="en-US"/>
           </a:p>
@@ -2028,7 +2029,7 @@
           <a:p>
             <a:fld id="{38FDAC3C-35A6-415C-9F03-738A6AC328B1}" type="datetime1">
               <a:rPr lang="ko-KR" altLang="en-US" smtClean="0"/>
-              <a:t>2026-09-18</a:t>
+              <a:t>2026-09-23</a:t>
             </a:fld>
             <a:endParaRPr lang="ko-KR" altLang="en-US"/>
           </a:p>
@@ -3622,7 +3623,7 @@
           <a:p>
             <a:fld id="{507A0DF1-AEE6-4B0D-89D2-351E7B3EF65C}" type="datetime1">
               <a:rPr lang="ko-KR" altLang="en-US" smtClean="0"/>
-              <a:t>2026-09-18</a:t>
+              <a:t>2026-09-23</a:t>
             </a:fld>
             <a:endParaRPr lang="ko-KR" altLang="en-US"/>
           </a:p>
@@ -4050,7 +4051,7 @@
           <a:p>
             <a:fld id="{CA93B8C9-630F-4D57-944D-04FD37CECCD3}" type="datetime1">
               <a:rPr lang="ko-KR" altLang="en-US" smtClean="0"/>
-              <a:t>2026-09-18</a:t>
+              <a:t>2026-09-23</a:t>
             </a:fld>
             <a:endParaRPr lang="ko-KR" altLang="en-US"/>
           </a:p>
@@ -4207,7 +4208,7 @@
           <a:p>
             <a:fld id="{E986165A-AC43-4902-9541-874ECD310BA3}" type="datetime1">
               <a:rPr lang="ko-KR" altLang="en-US" smtClean="0"/>
-              <a:t>2026-09-18</a:t>
+              <a:t>2026-09-23</a:t>
             </a:fld>
             <a:endParaRPr lang="ko-KR" altLang="en-US"/>
           </a:p>
@@ -4534,7 +4535,7 @@
           <a:p>
             <a:fld id="{47E6EE6D-2B0E-43A9-87A2-7354CDB998F4}" type="datetime1">
               <a:rPr lang="ko-KR" altLang="en-US" smtClean="0"/>
-              <a:t>2026-09-18</a:t>
+              <a:t>2026-09-23</a:t>
             </a:fld>
             <a:endParaRPr lang="ko-KR" altLang="en-US"/>
           </a:p>
@@ -4838,7 +4839,7 @@
           <a:p>
             <a:fld id="{5CC5944E-0BC8-4FAA-9F94-6B4B05834E10}" type="datetime1">
               <a:rPr lang="ko-KR" altLang="en-US" smtClean="0"/>
-              <a:t>2026-09-18</a:t>
+              <a:t>2026-09-23</a:t>
             </a:fld>
             <a:endParaRPr lang="ko-KR" altLang="en-US"/>
           </a:p>
@@ -23249,6 +23250,123 @@
   <p:cSld>
     <p:spTree>
       <p:nvGrpSpPr>
+        <p:cNvPr id="1" name=""/>
+        <p:cNvGrpSpPr/>
+        <p:nvPr/>
+      </p:nvGrpSpPr>
+      <p:grpSpPr>
+        <a:xfrm>
+          <a:off x="0" y="0"/>
+          <a:ext cx="0" cy="0"/>
+          <a:chOff x="0" y="0"/>
+          <a:chExt cx="0" cy="0"/>
+        </a:xfrm>
+      </p:grpSpPr>
+      <p:sp>
+        <p:nvSpPr>
+          <p:cNvPr id="2" name="제목 1">
+            <a:extLst>
+              <a:ext uri="{FF2B5EF4-FFF2-40B4-BE49-F238E27FC236}">
+                <a16:creationId xmlns:a16="http://schemas.microsoft.com/office/drawing/2014/main" id="{12D6932B-72D0-2B01-8C30-3929E3DAE29F}"/>
+              </a:ext>
+            </a:extLst>
+          </p:cNvPr>
+          <p:cNvSpPr>
+            <a:spLocks noGrp="1"/>
+          </p:cNvSpPr>
+          <p:nvPr>
+            <p:ph type="title"/>
+          </p:nvPr>
+        </p:nvSpPr>
+        <p:spPr/>
+        <p:txBody>
+          <a:bodyPr/>
+          <a:lstStyle/>
+          <a:p>
+            <a:r>
+              <a:rPr lang="ko-KR" altLang="en-US" dirty="0"/>
+              <a:t>전 세계 석탄 매장량</a:t>
+            </a:r>
+          </a:p>
+        </p:txBody>
+      </p:sp>
+      <p:sp>
+        <p:nvSpPr>
+          <p:cNvPr id="4" name="슬라이드 번호 개체 틀 3">
+            <a:extLst>
+              <a:ext uri="{FF2B5EF4-FFF2-40B4-BE49-F238E27FC236}">
+                <a16:creationId xmlns:a16="http://schemas.microsoft.com/office/drawing/2014/main" id="{E570FBA5-6B2E-D7CE-59E7-0FF960DC3545}"/>
+              </a:ext>
+            </a:extLst>
+          </p:cNvPr>
+          <p:cNvSpPr>
+            <a:spLocks noGrp="1"/>
+          </p:cNvSpPr>
+          <p:nvPr>
+            <p:ph type="sldNum" sz="quarter" idx="12"/>
+          </p:nvPr>
+        </p:nvSpPr>
+        <p:spPr/>
+        <p:txBody>
+          <a:bodyPr/>
+          <a:lstStyle/>
+          <a:p>
+            <a:fld id="{109C872D-39A9-4065-8BF3-6A613116E2A1}" type="slidenum">
+              <a:rPr lang="ko-KR" altLang="en-US" smtClean="0"/>
+              <a:t>36</a:t>
+            </a:fld>
+            <a:endParaRPr lang="ko-KR" altLang="en-US"/>
+          </a:p>
+        </p:txBody>
+      </p:sp>
+      <p:pic>
+        <p:nvPicPr>
+          <p:cNvPr id="6" name="그림 5">
+            <a:extLst>
+              <a:ext uri="{FF2B5EF4-FFF2-40B4-BE49-F238E27FC236}">
+                <a16:creationId xmlns:a16="http://schemas.microsoft.com/office/drawing/2014/main" id="{F54AAAD9-4AB8-24CB-7360-E00876A61E20}"/>
+              </a:ext>
+            </a:extLst>
+          </p:cNvPr>
+          <p:cNvPicPr>
+            <a:picLocks noChangeAspect="1"/>
+          </p:cNvPicPr>
+          <p:nvPr/>
+        </p:nvPicPr>
+        <p:blipFill>
+          <a:blip r:embed="rId2"/>
+          <a:stretch>
+            <a:fillRect/>
+          </a:stretch>
+        </p:blipFill>
+        <p:spPr>
+          <a:xfrm>
+            <a:off x="2744274" y="811369"/>
+            <a:ext cx="5694608" cy="5694608"/>
+          </a:xfrm>
+          <a:prstGeom prst="rect">
+            <a:avLst/>
+          </a:prstGeom>
+        </p:spPr>
+      </p:pic>
+    </p:spTree>
+    <p:extLst>
+      <p:ext uri="{BB962C8B-B14F-4D97-AF65-F5344CB8AC3E}">
+        <p14:creationId xmlns:p14="http://schemas.microsoft.com/office/powerpoint/2010/main" val="1176067750"/>
+      </p:ext>
+    </p:extLst>
+  </p:cSld>
+  <p:clrMapOvr>
+    <a:masterClrMapping/>
+  </p:clrMapOvr>
+</p:sld>
+</file>
+
+<file path=ppt/slides/slide37.xml><?xml version="1.0" encoding="utf-8"?>
+<p:sld xmlns:a="http://schemas.openxmlformats.org/drawingml/2006/main" xmlns:r="http://schemas.openxmlformats.org/officeDocument/2006/relationships" xmlns:p="http://schemas.openxmlformats.org/presentationml/2006/main">
+  <p:cSld>
+    <p:spTree>
+      <p:nvGrpSpPr>
         <p:cNvPr id="1" name="">
           <a:extLst>
             <a:ext uri="{FF2B5EF4-FFF2-40B4-BE49-F238E27FC236}">
@@ -23318,7 +23436,7 @@
           <a:p>
             <a:fld id="{109C872D-39A9-4065-8BF3-6A613116E2A1}" type="slidenum">
               <a:rPr lang="ko-KR" altLang="en-US" smtClean="0"/>
-              <a:t>36</a:t>
+              <a:t>37</a:t>
             </a:fld>
             <a:endParaRPr lang="ko-KR" altLang="en-US"/>
           </a:p>
@@ -23560,7 +23678,7 @@
 </p:sld>
 </file>
 
-<file path=ppt/slides/slide37.xml><?xml version="1.0" encoding="utf-8"?>
+<file path=ppt/slides/slide38.xml><?xml version="1.0" encoding="utf-8"?>
 <p:sld xmlns:a="http://schemas.openxmlformats.org/drawingml/2006/main" xmlns:r="http://schemas.openxmlformats.org/officeDocument/2006/relationships" xmlns:p="http://schemas.openxmlformats.org/presentationml/2006/main">
   <p:cSld>
     <p:spTree>
@@ -23634,7 +23752,7 @@
           <a:p>
             <a:fld id="{109C872D-39A9-4065-8BF3-6A613116E2A1}" type="slidenum">
               <a:rPr lang="ko-KR" altLang="en-US" smtClean="0"/>
-              <a:t>37</a:t>
+              <a:t>38</a:t>
             </a:fld>
             <a:endParaRPr lang="ko-KR" altLang="en-US"/>
           </a:p>
@@ -28915,7 +29033,7 @@
 </p:sld>
 </file>
 
-<file path=ppt/slides/slide38.xml><?xml version="1.0" encoding="utf-8"?>
+<file path=ppt/slides/slide39.xml><?xml version="1.0" encoding="utf-8"?>
 <p:sld xmlns:a="http://schemas.openxmlformats.org/drawingml/2006/main" xmlns:r="http://schemas.openxmlformats.org/officeDocument/2006/relationships" xmlns:p="http://schemas.openxmlformats.org/presentationml/2006/main">
   <p:cSld>
     <p:spTree>
@@ -28989,7 +29107,7 @@
           <a:p>
             <a:fld id="{109C872D-39A9-4065-8BF3-6A613116E2A1}" type="slidenum">
               <a:rPr lang="ko-KR" altLang="en-US" smtClean="0"/>
-              <a:t>38</a:t>
+              <a:t>39</a:t>
             </a:fld>
             <a:endParaRPr lang="ko-KR" altLang="en-US"/>
           </a:p>
@@ -29271,7 +29389,304 @@
 </p:sld>
 </file>
 
-<file path=ppt/slides/slide39.xml><?xml version="1.0" encoding="utf-8"?>
+<file path=ppt/slides/slide4.xml><?xml version="1.0" encoding="utf-8"?>
+<p:sld xmlns:a="http://schemas.openxmlformats.org/drawingml/2006/main" xmlns:r="http://schemas.openxmlformats.org/officeDocument/2006/relationships" xmlns:p="http://schemas.openxmlformats.org/presentationml/2006/main">
+  <p:cSld>
+    <p:spTree>
+      <p:nvGrpSpPr>
+        <p:cNvPr id="1" name=""/>
+        <p:cNvGrpSpPr/>
+        <p:nvPr/>
+      </p:nvGrpSpPr>
+      <p:grpSpPr>
+        <a:xfrm>
+          <a:off x="0" y="0"/>
+          <a:ext cx="0" cy="0"/>
+          <a:chOff x="0" y="0"/>
+          <a:chExt cx="0" cy="0"/>
+        </a:xfrm>
+      </p:grpSpPr>
+      <p:sp>
+        <p:nvSpPr>
+          <p:cNvPr id="2" name="제목 1">
+            <a:extLst>
+              <a:ext uri="{FF2B5EF4-FFF2-40B4-BE49-F238E27FC236}">
+                <a16:creationId xmlns:a16="http://schemas.microsoft.com/office/drawing/2014/main" id="{708E53AA-7D50-5F4A-320F-293F315471D7}"/>
+              </a:ext>
+            </a:extLst>
+          </p:cNvPr>
+          <p:cNvSpPr>
+            <a:spLocks noGrp="1"/>
+          </p:cNvSpPr>
+          <p:nvPr>
+            <p:ph type="title"/>
+          </p:nvPr>
+        </p:nvSpPr>
+        <p:spPr/>
+        <p:txBody>
+          <a:bodyPr/>
+          <a:lstStyle/>
+          <a:p>
+            <a:r>
+              <a:rPr lang="ko-KR" altLang="en-US" dirty="0"/>
+              <a:t>서론</a:t>
+            </a:r>
+          </a:p>
+        </p:txBody>
+      </p:sp>
+      <p:sp>
+        <p:nvSpPr>
+          <p:cNvPr id="4" name="슬라이드 번호 개체 틀 3">
+            <a:extLst>
+              <a:ext uri="{FF2B5EF4-FFF2-40B4-BE49-F238E27FC236}">
+                <a16:creationId xmlns:a16="http://schemas.microsoft.com/office/drawing/2014/main" id="{0E66E9B2-B0DB-FDCD-AA50-636EA4E5B253}"/>
+              </a:ext>
+            </a:extLst>
+          </p:cNvPr>
+          <p:cNvSpPr>
+            <a:spLocks noGrp="1"/>
+          </p:cNvSpPr>
+          <p:nvPr>
+            <p:ph type="sldNum" sz="quarter" idx="12"/>
+          </p:nvPr>
+        </p:nvSpPr>
+        <p:spPr/>
+        <p:txBody>
+          <a:bodyPr/>
+          <a:lstStyle/>
+          <a:p>
+            <a:fld id="{109C872D-39A9-4065-8BF3-6A613116E2A1}" type="slidenum">
+              <a:rPr lang="ko-KR" altLang="en-US" smtClean="0"/>
+              <a:t>4</a:t>
+            </a:fld>
+            <a:endParaRPr lang="ko-KR" altLang="en-US"/>
+          </a:p>
+        </p:txBody>
+      </p:sp>
+      <p:sp>
+        <p:nvSpPr>
+          <p:cNvPr id="3" name="TextBox 2">
+            <a:extLst>
+              <a:ext uri="{FF2B5EF4-FFF2-40B4-BE49-F238E27FC236}">
+                <a16:creationId xmlns:a16="http://schemas.microsoft.com/office/drawing/2014/main" id="{6C27E35B-63AE-3D62-3078-BE10F308BEDD}"/>
+              </a:ext>
+            </a:extLst>
+          </p:cNvPr>
+          <p:cNvSpPr txBox="1"/>
+          <p:nvPr/>
+        </p:nvSpPr>
+        <p:spPr>
+          <a:xfrm>
+            <a:off x="288790" y="958844"/>
+            <a:ext cx="11118453" cy="3368679"/>
+          </a:xfrm>
+          <a:prstGeom prst="rect">
+            <a:avLst/>
+          </a:prstGeom>
+          <a:noFill/>
+        </p:spPr>
+        <p:txBody>
+          <a:bodyPr wrap="square" rtlCol="0" anchor="t">
+            <a:spAutoFit/>
+          </a:bodyPr>
+          <a:lstStyle/>
+          <a:p>
+            <a:pPr marL="377825" indent="-285750">
+              <a:lnSpc>
+                <a:spcPct val="150000"/>
+              </a:lnSpc>
+              <a:buFont typeface="Arial" panose="020B0604020202020204" pitchFamily="34" charset="0"/>
+              <a:buChar char="•"/>
+            </a:pPr>
+            <a:r>
+              <a:rPr lang="ko-KR" altLang="en-US" sz="1600" dirty="0"/>
+              <a:t>석탄 산업은 수세기 동안 산업화의 견인차로서 글로벌 에너지 체계 형성에 중대한 역할을 수행해 왔다</a:t>
+            </a:r>
+            <a:r>
+              <a:rPr lang="en-US" altLang="ko-KR" sz="1600" dirty="0"/>
+              <a:t>.</a:t>
+            </a:r>
+          </a:p>
+          <a:p>
+            <a:pPr marL="835025" lvl="1" indent="-285750">
+              <a:lnSpc>
+                <a:spcPct val="150000"/>
+              </a:lnSpc>
+              <a:buFont typeface="Wingdings" panose="05000000000000000000" pitchFamily="2" charset="2"/>
+              <a:buChar char="ü"/>
+            </a:pPr>
+            <a:r>
+              <a:rPr lang="ko-KR" altLang="en-US" sz="1600" dirty="0"/>
+              <a:t>고대 중국과 로마 시대에도 석탄은 난방 및 금속 가공에 제한적으로 사용되었지만</a:t>
+            </a:r>
+            <a:r>
+              <a:rPr lang="en-US" altLang="ko-KR" sz="1600" dirty="0"/>
+              <a:t>, </a:t>
+            </a:r>
+            <a:r>
+              <a:rPr lang="ko-KR" altLang="en-US" sz="1600" dirty="0"/>
+              <a:t>그 전략적 중요성이 본격적으로 부각된 시기는 </a:t>
+            </a:r>
+            <a:r>
+              <a:rPr lang="en-US" altLang="ko-KR" sz="1600" dirty="0"/>
+              <a:t>18</a:t>
+            </a:r>
+            <a:r>
+              <a:rPr lang="ko-KR" altLang="en-US" sz="1600" dirty="0"/>
+              <a:t>세기 후반부터 시작된 산업혁명 시기다</a:t>
+            </a:r>
+            <a:r>
+              <a:rPr lang="en-US" altLang="ko-KR" sz="1600" dirty="0"/>
+              <a:t>.</a:t>
+            </a:r>
+          </a:p>
+          <a:p>
+            <a:pPr marL="1292225" lvl="2" indent="-285750">
+              <a:lnSpc>
+                <a:spcPct val="150000"/>
+              </a:lnSpc>
+              <a:buFont typeface="Wingdings" panose="05000000000000000000" pitchFamily="2" charset="2"/>
+              <a:buChar char="Ø"/>
+            </a:pPr>
+            <a:r>
+              <a:rPr lang="ko-KR" altLang="en-US" sz="1600" dirty="0"/>
+              <a:t>이 시기 석탄은 증기기관의 주요 연료로 사용되며 </a:t>
+            </a:r>
+            <a:r>
+              <a:rPr lang="ko-KR" altLang="en-US" sz="1600" dirty="0" err="1"/>
+              <a:t>면직업</a:t>
+            </a:r>
+            <a:r>
+              <a:rPr lang="en-US" altLang="ko-KR" sz="1600" dirty="0"/>
+              <a:t>, </a:t>
+            </a:r>
+            <a:r>
+              <a:rPr lang="ko-KR" altLang="en-US" sz="1600" dirty="0"/>
+              <a:t>철도 운송 등 기계화된 산업 부문의 비약적 성장을 가능하게 하였고</a:t>
+            </a:r>
+            <a:r>
+              <a:rPr lang="en-US" altLang="ko-KR" sz="1600" dirty="0"/>
+              <a:t>, </a:t>
+            </a:r>
+            <a:r>
+              <a:rPr lang="ko-KR" altLang="en-US" sz="1600" dirty="0"/>
+              <a:t>이는 영국</a:t>
+            </a:r>
+            <a:r>
+              <a:rPr lang="en-US" altLang="ko-KR" sz="1600" dirty="0"/>
+              <a:t>, </a:t>
+            </a:r>
+            <a:r>
+              <a:rPr lang="ko-KR" altLang="en-US" sz="1600" dirty="0"/>
+              <a:t>독일</a:t>
+            </a:r>
+            <a:r>
+              <a:rPr lang="en-US" altLang="ko-KR" sz="1600" dirty="0"/>
+              <a:t>, </a:t>
+            </a:r>
+            <a:r>
+              <a:rPr lang="ko-KR" altLang="en-US" sz="1600" dirty="0"/>
+              <a:t>미국 등 주요 산업국의 경제적 도약을 견인하였다</a:t>
+            </a:r>
+            <a:r>
+              <a:rPr lang="en-US" altLang="ko-KR" sz="1600" dirty="0"/>
+              <a:t>.</a:t>
+            </a:r>
+          </a:p>
+          <a:p>
+            <a:pPr marL="835025" lvl="1" indent="-285750">
+              <a:lnSpc>
+                <a:spcPct val="150000"/>
+              </a:lnSpc>
+              <a:buFont typeface="Wingdings" panose="05000000000000000000" pitchFamily="2" charset="2"/>
+              <a:buChar char="ü"/>
+            </a:pPr>
+            <a:r>
+              <a:rPr lang="en-US" altLang="ko-KR" sz="1600" dirty="0"/>
+              <a:t>19</a:t>
+            </a:r>
+            <a:r>
+              <a:rPr lang="ko-KR" altLang="en-US" sz="1600" dirty="0"/>
+              <a:t>세기 후반부터 </a:t>
+            </a:r>
+            <a:r>
+              <a:rPr lang="en-US" altLang="ko-KR" sz="1600" dirty="0"/>
+              <a:t>20</a:t>
+            </a:r>
+            <a:r>
+              <a:rPr lang="ko-KR" altLang="en-US" sz="1600" dirty="0"/>
+              <a:t>세기 초반까지 석탄은 가정용 난방</a:t>
+            </a:r>
+            <a:r>
+              <a:rPr lang="en-US" altLang="ko-KR" sz="1600" dirty="0"/>
+              <a:t>, </a:t>
+            </a:r>
+            <a:r>
+              <a:rPr lang="ko-KR" altLang="en-US" sz="1600" dirty="0"/>
+              <a:t>공장동력</a:t>
+            </a:r>
+            <a:r>
+              <a:rPr lang="en-US" altLang="ko-KR" sz="1600" dirty="0"/>
+              <a:t>, </a:t>
+            </a:r>
+            <a:r>
+              <a:rPr lang="ko-KR" altLang="en-US" sz="1600" dirty="0"/>
+              <a:t>전력생산 등 광범위한 부문에서 주요 </a:t>
+            </a:r>
+            <a:r>
+              <a:rPr lang="en-US" altLang="ko-KR" sz="1600" dirty="0"/>
+              <a:t>1</a:t>
+            </a:r>
+            <a:r>
+              <a:rPr lang="ko-KR" altLang="en-US" sz="1600" dirty="0"/>
+              <a:t>차 에너지원으로 기능하며 에너지 소비의 중심축을 형성하였다</a:t>
+            </a:r>
+            <a:r>
+              <a:rPr lang="en-US" altLang="ko-KR" sz="1600" dirty="0"/>
+              <a:t>.</a:t>
+            </a:r>
+          </a:p>
+          <a:p>
+            <a:pPr marL="1292225" lvl="2" indent="-285750">
+              <a:lnSpc>
+                <a:spcPct val="150000"/>
+              </a:lnSpc>
+              <a:buFont typeface="Wingdings" panose="05000000000000000000" pitchFamily="2" charset="2"/>
+              <a:buChar char="Ø"/>
+            </a:pPr>
+            <a:r>
+              <a:rPr lang="ko-KR" altLang="en-US" sz="1600" dirty="0"/>
+              <a:t>유럽과 북미 지역을 중심으로 대규모 광산 개발과 철도망 확충이 이루어지면서</a:t>
+            </a:r>
+            <a:r>
+              <a:rPr lang="en-US" altLang="ko-KR" sz="1600" dirty="0"/>
+              <a:t>, </a:t>
+            </a:r>
+            <a:r>
+              <a:rPr lang="ko-KR" altLang="en-US" sz="1600" dirty="0"/>
+              <a:t>석탄은 산업화와 도시화를 가속화하는 기반 인프라로 작용하였다</a:t>
+            </a:r>
+            <a:r>
+              <a:rPr lang="en-US" altLang="ko-KR" sz="1600" dirty="0"/>
+              <a:t>.</a:t>
+            </a:r>
+          </a:p>
+        </p:txBody>
+      </p:sp>
+    </p:spTree>
+    <p:extLst>
+      <p:ext uri="{BB962C8B-B14F-4D97-AF65-F5344CB8AC3E}">
+        <p14:creationId xmlns:p14="http://schemas.microsoft.com/office/powerpoint/2010/main" val="2183003270"/>
+      </p:ext>
+    </p:extLst>
+  </p:cSld>
+  <p:clrMapOvr>
+    <a:masterClrMapping/>
+  </p:clrMapOvr>
+</p:sld>
+</file>
+
+<file path=ppt/slides/slide40.xml><?xml version="1.0" encoding="utf-8"?>
 <p:sld xmlns:a="http://schemas.openxmlformats.org/drawingml/2006/main" xmlns:r="http://schemas.openxmlformats.org/officeDocument/2006/relationships" xmlns:p="http://schemas.openxmlformats.org/presentationml/2006/main">
   <p:cSld>
     <p:spTree>
@@ -29345,7 +29760,7 @@
           <a:p>
             <a:fld id="{109C872D-39A9-4065-8BF3-6A613116E2A1}" type="slidenum">
               <a:rPr lang="ko-KR" altLang="en-US" smtClean="0"/>
-              <a:t>39</a:t>
+              <a:t>40</a:t>
             </a:fld>
             <a:endParaRPr lang="ko-KR" altLang="en-US"/>
           </a:p>
@@ -34926,304 +35341,7 @@
 </p:sld>
 </file>
 
-<file path=ppt/slides/slide4.xml><?xml version="1.0" encoding="utf-8"?>
-<p:sld xmlns:a="http://schemas.openxmlformats.org/drawingml/2006/main" xmlns:r="http://schemas.openxmlformats.org/officeDocument/2006/relationships" xmlns:p="http://schemas.openxmlformats.org/presentationml/2006/main">
-  <p:cSld>
-    <p:spTree>
-      <p:nvGrpSpPr>
-        <p:cNvPr id="1" name=""/>
-        <p:cNvGrpSpPr/>
-        <p:nvPr/>
-      </p:nvGrpSpPr>
-      <p:grpSpPr>
-        <a:xfrm>
-          <a:off x="0" y="0"/>
-          <a:ext cx="0" cy="0"/>
-          <a:chOff x="0" y="0"/>
-          <a:chExt cx="0" cy="0"/>
-        </a:xfrm>
-      </p:grpSpPr>
-      <p:sp>
-        <p:nvSpPr>
-          <p:cNvPr id="2" name="제목 1">
-            <a:extLst>
-              <a:ext uri="{FF2B5EF4-FFF2-40B4-BE49-F238E27FC236}">
-                <a16:creationId xmlns:a16="http://schemas.microsoft.com/office/drawing/2014/main" id="{708E53AA-7D50-5F4A-320F-293F315471D7}"/>
-              </a:ext>
-            </a:extLst>
-          </p:cNvPr>
-          <p:cNvSpPr>
-            <a:spLocks noGrp="1"/>
-          </p:cNvSpPr>
-          <p:nvPr>
-            <p:ph type="title"/>
-          </p:nvPr>
-        </p:nvSpPr>
-        <p:spPr/>
-        <p:txBody>
-          <a:bodyPr/>
-          <a:lstStyle/>
-          <a:p>
-            <a:r>
-              <a:rPr lang="ko-KR" altLang="en-US" dirty="0"/>
-              <a:t>서론</a:t>
-            </a:r>
-          </a:p>
-        </p:txBody>
-      </p:sp>
-      <p:sp>
-        <p:nvSpPr>
-          <p:cNvPr id="4" name="슬라이드 번호 개체 틀 3">
-            <a:extLst>
-              <a:ext uri="{FF2B5EF4-FFF2-40B4-BE49-F238E27FC236}">
-                <a16:creationId xmlns:a16="http://schemas.microsoft.com/office/drawing/2014/main" id="{0E66E9B2-B0DB-FDCD-AA50-636EA4E5B253}"/>
-              </a:ext>
-            </a:extLst>
-          </p:cNvPr>
-          <p:cNvSpPr>
-            <a:spLocks noGrp="1"/>
-          </p:cNvSpPr>
-          <p:nvPr>
-            <p:ph type="sldNum" sz="quarter" idx="12"/>
-          </p:nvPr>
-        </p:nvSpPr>
-        <p:spPr/>
-        <p:txBody>
-          <a:bodyPr/>
-          <a:lstStyle/>
-          <a:p>
-            <a:fld id="{109C872D-39A9-4065-8BF3-6A613116E2A1}" type="slidenum">
-              <a:rPr lang="ko-KR" altLang="en-US" smtClean="0"/>
-              <a:t>4</a:t>
-            </a:fld>
-            <a:endParaRPr lang="ko-KR" altLang="en-US"/>
-          </a:p>
-        </p:txBody>
-      </p:sp>
-      <p:sp>
-        <p:nvSpPr>
-          <p:cNvPr id="3" name="TextBox 2">
-            <a:extLst>
-              <a:ext uri="{FF2B5EF4-FFF2-40B4-BE49-F238E27FC236}">
-                <a16:creationId xmlns:a16="http://schemas.microsoft.com/office/drawing/2014/main" id="{6C27E35B-63AE-3D62-3078-BE10F308BEDD}"/>
-              </a:ext>
-            </a:extLst>
-          </p:cNvPr>
-          <p:cNvSpPr txBox="1"/>
-          <p:nvPr/>
-        </p:nvSpPr>
-        <p:spPr>
-          <a:xfrm>
-            <a:off x="288790" y="958844"/>
-            <a:ext cx="11118453" cy="3368679"/>
-          </a:xfrm>
-          <a:prstGeom prst="rect">
-            <a:avLst/>
-          </a:prstGeom>
-          <a:noFill/>
-        </p:spPr>
-        <p:txBody>
-          <a:bodyPr wrap="square" rtlCol="0" anchor="t">
-            <a:spAutoFit/>
-          </a:bodyPr>
-          <a:lstStyle/>
-          <a:p>
-            <a:pPr marL="377825" indent="-285750">
-              <a:lnSpc>
-                <a:spcPct val="150000"/>
-              </a:lnSpc>
-              <a:buFont typeface="Arial" panose="020B0604020202020204" pitchFamily="34" charset="0"/>
-              <a:buChar char="•"/>
-            </a:pPr>
-            <a:r>
-              <a:rPr lang="ko-KR" altLang="en-US" sz="1600" dirty="0"/>
-              <a:t>석탄 산업은 수세기 동안 산업화의 견인차로서 글로벌 에너지 체계 형성에 중대한 역할을 수행해 왔다</a:t>
-            </a:r>
-            <a:r>
-              <a:rPr lang="en-US" altLang="ko-KR" sz="1600" dirty="0"/>
-              <a:t>.</a:t>
-            </a:r>
-          </a:p>
-          <a:p>
-            <a:pPr marL="835025" lvl="1" indent="-285750">
-              <a:lnSpc>
-                <a:spcPct val="150000"/>
-              </a:lnSpc>
-              <a:buFont typeface="Wingdings" panose="05000000000000000000" pitchFamily="2" charset="2"/>
-              <a:buChar char="ü"/>
-            </a:pPr>
-            <a:r>
-              <a:rPr lang="ko-KR" altLang="en-US" sz="1600" dirty="0"/>
-              <a:t>고대 중국과 로마 시대에도 석탄은 난방 및 금속 가공에 제한적으로 사용되었지만</a:t>
-            </a:r>
-            <a:r>
-              <a:rPr lang="en-US" altLang="ko-KR" sz="1600" dirty="0"/>
-              <a:t>, </a:t>
-            </a:r>
-            <a:r>
-              <a:rPr lang="ko-KR" altLang="en-US" sz="1600" dirty="0"/>
-              <a:t>그 전략적 중요성이 본격적으로 부각된 시기는 </a:t>
-            </a:r>
-            <a:r>
-              <a:rPr lang="en-US" altLang="ko-KR" sz="1600" dirty="0"/>
-              <a:t>18</a:t>
-            </a:r>
-            <a:r>
-              <a:rPr lang="ko-KR" altLang="en-US" sz="1600" dirty="0"/>
-              <a:t>세기 후반부터 시작된 산업혁명 시기다</a:t>
-            </a:r>
-            <a:r>
-              <a:rPr lang="en-US" altLang="ko-KR" sz="1600" dirty="0"/>
-              <a:t>.</a:t>
-            </a:r>
-          </a:p>
-          <a:p>
-            <a:pPr marL="1292225" lvl="2" indent="-285750">
-              <a:lnSpc>
-                <a:spcPct val="150000"/>
-              </a:lnSpc>
-              <a:buFont typeface="Wingdings" panose="05000000000000000000" pitchFamily="2" charset="2"/>
-              <a:buChar char="Ø"/>
-            </a:pPr>
-            <a:r>
-              <a:rPr lang="ko-KR" altLang="en-US" sz="1600" dirty="0"/>
-              <a:t>이 시기 석탄은 증기기관의 주요 연료로 사용되며 </a:t>
-            </a:r>
-            <a:r>
-              <a:rPr lang="ko-KR" altLang="en-US" sz="1600" dirty="0" err="1"/>
-              <a:t>면직업</a:t>
-            </a:r>
-            <a:r>
-              <a:rPr lang="en-US" altLang="ko-KR" sz="1600" dirty="0"/>
-              <a:t>, </a:t>
-            </a:r>
-            <a:r>
-              <a:rPr lang="ko-KR" altLang="en-US" sz="1600" dirty="0"/>
-              <a:t>철도 운송 등 기계화된 산업 부문의 비약적 성장을 가능하게 하였고</a:t>
-            </a:r>
-            <a:r>
-              <a:rPr lang="en-US" altLang="ko-KR" sz="1600" dirty="0"/>
-              <a:t>, </a:t>
-            </a:r>
-            <a:r>
-              <a:rPr lang="ko-KR" altLang="en-US" sz="1600" dirty="0"/>
-              <a:t>이는 영국</a:t>
-            </a:r>
-            <a:r>
-              <a:rPr lang="en-US" altLang="ko-KR" sz="1600" dirty="0"/>
-              <a:t>, </a:t>
-            </a:r>
-            <a:r>
-              <a:rPr lang="ko-KR" altLang="en-US" sz="1600" dirty="0"/>
-              <a:t>독일</a:t>
-            </a:r>
-            <a:r>
-              <a:rPr lang="en-US" altLang="ko-KR" sz="1600" dirty="0"/>
-              <a:t>, </a:t>
-            </a:r>
-            <a:r>
-              <a:rPr lang="ko-KR" altLang="en-US" sz="1600" dirty="0"/>
-              <a:t>미국 등 주요 산업국의 경제적 도약을 견인하였다</a:t>
-            </a:r>
-            <a:r>
-              <a:rPr lang="en-US" altLang="ko-KR" sz="1600" dirty="0"/>
-              <a:t>.</a:t>
-            </a:r>
-          </a:p>
-          <a:p>
-            <a:pPr marL="835025" lvl="1" indent="-285750">
-              <a:lnSpc>
-                <a:spcPct val="150000"/>
-              </a:lnSpc>
-              <a:buFont typeface="Wingdings" panose="05000000000000000000" pitchFamily="2" charset="2"/>
-              <a:buChar char="ü"/>
-            </a:pPr>
-            <a:r>
-              <a:rPr lang="en-US" altLang="ko-KR" sz="1600" dirty="0"/>
-              <a:t>19</a:t>
-            </a:r>
-            <a:r>
-              <a:rPr lang="ko-KR" altLang="en-US" sz="1600" dirty="0"/>
-              <a:t>세기 후반부터 </a:t>
-            </a:r>
-            <a:r>
-              <a:rPr lang="en-US" altLang="ko-KR" sz="1600" dirty="0"/>
-              <a:t>20</a:t>
-            </a:r>
-            <a:r>
-              <a:rPr lang="ko-KR" altLang="en-US" sz="1600" dirty="0"/>
-              <a:t>세기 초반까지 석탄은 가정용 난방</a:t>
-            </a:r>
-            <a:r>
-              <a:rPr lang="en-US" altLang="ko-KR" sz="1600" dirty="0"/>
-              <a:t>, </a:t>
-            </a:r>
-            <a:r>
-              <a:rPr lang="ko-KR" altLang="en-US" sz="1600" dirty="0"/>
-              <a:t>공장동력</a:t>
-            </a:r>
-            <a:r>
-              <a:rPr lang="en-US" altLang="ko-KR" sz="1600" dirty="0"/>
-              <a:t>, </a:t>
-            </a:r>
-            <a:r>
-              <a:rPr lang="ko-KR" altLang="en-US" sz="1600" dirty="0"/>
-              <a:t>전력생산 등 광범위한 부문에서 주요 </a:t>
-            </a:r>
-            <a:r>
-              <a:rPr lang="en-US" altLang="ko-KR" sz="1600" dirty="0"/>
-              <a:t>1</a:t>
-            </a:r>
-            <a:r>
-              <a:rPr lang="ko-KR" altLang="en-US" sz="1600" dirty="0"/>
-              <a:t>차 에너지원으로 기능하며 에너지 소비의 중심축을 형성하였다</a:t>
-            </a:r>
-            <a:r>
-              <a:rPr lang="en-US" altLang="ko-KR" sz="1600" dirty="0"/>
-              <a:t>.</a:t>
-            </a:r>
-          </a:p>
-          <a:p>
-            <a:pPr marL="1292225" lvl="2" indent="-285750">
-              <a:lnSpc>
-                <a:spcPct val="150000"/>
-              </a:lnSpc>
-              <a:buFont typeface="Wingdings" panose="05000000000000000000" pitchFamily="2" charset="2"/>
-              <a:buChar char="Ø"/>
-            </a:pPr>
-            <a:r>
-              <a:rPr lang="ko-KR" altLang="en-US" sz="1600" dirty="0"/>
-              <a:t>유럽과 북미 지역을 중심으로 대규모 광산 개발과 철도망 확충이 이루어지면서</a:t>
-            </a:r>
-            <a:r>
-              <a:rPr lang="en-US" altLang="ko-KR" sz="1600" dirty="0"/>
-              <a:t>, </a:t>
-            </a:r>
-            <a:r>
-              <a:rPr lang="ko-KR" altLang="en-US" sz="1600" dirty="0"/>
-              <a:t>석탄은 산업화와 도시화를 가속화하는 기반 인프라로 작용하였다</a:t>
-            </a:r>
-            <a:r>
-              <a:rPr lang="en-US" altLang="ko-KR" sz="1600" dirty="0"/>
-              <a:t>.</a:t>
-            </a:r>
-          </a:p>
-        </p:txBody>
-      </p:sp>
-    </p:spTree>
-    <p:extLst>
-      <p:ext uri="{BB962C8B-B14F-4D97-AF65-F5344CB8AC3E}">
-        <p14:creationId xmlns:p14="http://schemas.microsoft.com/office/powerpoint/2010/main" val="2183003270"/>
-      </p:ext>
-    </p:extLst>
-  </p:cSld>
-  <p:clrMapOvr>
-    <a:masterClrMapping/>
-  </p:clrMapOvr>
-</p:sld>
-</file>
-
-<file path=ppt/slides/slide40.xml><?xml version="1.0" encoding="utf-8"?>
+<file path=ppt/slides/slide41.xml><?xml version="1.0" encoding="utf-8"?>
 <p:sld xmlns:a="http://schemas.openxmlformats.org/drawingml/2006/main" xmlns:r="http://schemas.openxmlformats.org/officeDocument/2006/relationships" xmlns:p="http://schemas.openxmlformats.org/presentationml/2006/main">
   <p:cSld>
     <p:spTree>
@@ -35297,7 +35415,7 @@
           <a:p>
             <a:fld id="{109C872D-39A9-4065-8BF3-6A613116E2A1}" type="slidenum">
               <a:rPr lang="ko-KR" altLang="en-US" smtClean="0"/>
-              <a:t>40</a:t>
+              <a:t>41</a:t>
             </a:fld>
             <a:endParaRPr lang="ko-KR" altLang="en-US"/>
           </a:p>
@@ -35620,7 +35738,7 @@
 </p:sld>
 </file>
 
-<file path=ppt/slides/slide41.xml><?xml version="1.0" encoding="utf-8"?>
+<file path=ppt/slides/slide42.xml><?xml version="1.0" encoding="utf-8"?>
 <p:sld xmlns:a="http://schemas.openxmlformats.org/drawingml/2006/main" xmlns:r="http://schemas.openxmlformats.org/officeDocument/2006/relationships" xmlns:p="http://schemas.openxmlformats.org/presentationml/2006/main">
   <p:cSld>
     <p:spTree>
@@ -35694,7 +35812,7 @@
           <a:p>
             <a:fld id="{109C872D-39A9-4065-8BF3-6A613116E2A1}" type="slidenum">
               <a:rPr lang="ko-KR" altLang="en-US" smtClean="0"/>
-              <a:t>41</a:t>
+              <a:t>42</a:t>
             </a:fld>
             <a:endParaRPr lang="ko-KR" altLang="en-US"/>
           </a:p>
@@ -35975,7 +36093,7 @@
 </p:sld>
 </file>
 
-<file path=ppt/slides/slide42.xml><?xml version="1.0" encoding="utf-8"?>
+<file path=ppt/slides/slide43.xml><?xml version="1.0" encoding="utf-8"?>
 <p:sld xmlns:a="http://schemas.openxmlformats.org/drawingml/2006/main" xmlns:r="http://schemas.openxmlformats.org/officeDocument/2006/relationships" xmlns:p="http://schemas.openxmlformats.org/presentationml/2006/main">
   <p:cSld>
     <p:spTree>
@@ -36049,7 +36167,7 @@
           <a:p>
             <a:fld id="{109C872D-39A9-4065-8BF3-6A613116E2A1}" type="slidenum">
               <a:rPr lang="ko-KR" altLang="en-US" smtClean="0"/>
-              <a:t>42</a:t>
+              <a:t>43</a:t>
             </a:fld>
             <a:endParaRPr lang="ko-KR" altLang="en-US"/>
           </a:p>
@@ -36304,7 +36422,7 @@
 </p:sld>
 </file>
 
-<file path=ppt/slides/slide43.xml><?xml version="1.0" encoding="utf-8"?>
+<file path=ppt/slides/slide44.xml><?xml version="1.0" encoding="utf-8"?>
 <p:sld xmlns:a="http://schemas.openxmlformats.org/drawingml/2006/main" xmlns:r="http://schemas.openxmlformats.org/officeDocument/2006/relationships" xmlns:p="http://schemas.openxmlformats.org/presentationml/2006/main">
   <p:cSld>
     <p:spTree>
@@ -36378,7 +36496,7 @@
           <a:p>
             <a:fld id="{109C872D-39A9-4065-8BF3-6A613116E2A1}" type="slidenum">
               <a:rPr lang="ko-KR" altLang="en-US" smtClean="0"/>
-              <a:t>43</a:t>
+              <a:t>44</a:t>
             </a:fld>
             <a:endParaRPr lang="ko-KR" altLang="en-US"/>
           </a:p>
@@ -36641,7 +36759,7 @@
 </p:sld>
 </file>
 
-<file path=ppt/slides/slide44.xml><?xml version="1.0" encoding="utf-8"?>
+<file path=ppt/slides/slide45.xml><?xml version="1.0" encoding="utf-8"?>
 <p:sld xmlns:a="http://schemas.openxmlformats.org/drawingml/2006/main" xmlns:r="http://schemas.openxmlformats.org/officeDocument/2006/relationships" xmlns:p="http://schemas.openxmlformats.org/presentationml/2006/main">
   <p:cSld>
     <p:spTree>
@@ -36715,7 +36833,7 @@
           <a:p>
             <a:fld id="{109C872D-39A9-4065-8BF3-6A613116E2A1}" type="slidenum">
               <a:rPr lang="ko-KR" altLang="en-US" smtClean="0"/>
-              <a:t>44</a:t>
+              <a:t>45</a:t>
             </a:fld>
             <a:endParaRPr lang="ko-KR" altLang="en-US"/>
           </a:p>
@@ -36975,7 +37093,7 @@
 </p:sld>
 </file>
 
-<file path=ppt/slides/slide45.xml><?xml version="1.0" encoding="utf-8"?>
+<file path=ppt/slides/slide46.xml><?xml version="1.0" encoding="utf-8"?>
 <p:sld xmlns:a="http://schemas.openxmlformats.org/drawingml/2006/main" xmlns:r="http://schemas.openxmlformats.org/officeDocument/2006/relationships" xmlns:p="http://schemas.openxmlformats.org/presentationml/2006/main">
   <p:cSld>
     <p:spTree>
@@ -37058,7 +37176,7 @@
           <a:p>
             <a:fld id="{109C872D-39A9-4065-8BF3-6A613116E2A1}" type="slidenum">
               <a:rPr lang="ko-KR" altLang="en-US" smtClean="0"/>
-              <a:t>45</a:t>
+              <a:t>46</a:t>
             </a:fld>
             <a:endParaRPr lang="ko-KR" altLang="en-US"/>
           </a:p>
@@ -37118,7 +37236,7 @@
 </p:sld>
 </file>
 
-<file path=ppt/slides/slide46.xml><?xml version="1.0" encoding="utf-8"?>
+<file path=ppt/slides/slide47.xml><?xml version="1.0" encoding="utf-8"?>
 <p:sld xmlns:a="http://schemas.openxmlformats.org/drawingml/2006/main" xmlns:r="http://schemas.openxmlformats.org/officeDocument/2006/relationships" xmlns:p="http://schemas.openxmlformats.org/presentationml/2006/main">
   <p:cSld>
     <p:spTree>
@@ -37192,7 +37310,7 @@
           <a:p>
             <a:fld id="{109C872D-39A9-4065-8BF3-6A613116E2A1}" type="slidenum">
               <a:rPr lang="ko-KR" altLang="en-US" smtClean="0"/>
-              <a:t>46</a:t>
+              <a:t>47</a:t>
             </a:fld>
             <a:endParaRPr lang="ko-KR" altLang="en-US"/>
           </a:p>
@@ -37464,7 +37582,7 @@
 </p:sld>
 </file>
 
-<file path=ppt/slides/slide47.xml><?xml version="1.0" encoding="utf-8"?>
+<file path=ppt/slides/slide48.xml><?xml version="1.0" encoding="utf-8"?>
 <p:sld xmlns:a="http://schemas.openxmlformats.org/drawingml/2006/main" xmlns:r="http://schemas.openxmlformats.org/officeDocument/2006/relationships" xmlns:p="http://schemas.openxmlformats.org/presentationml/2006/main">
   <p:cSld>
     <p:spTree>
@@ -37538,7 +37656,7 @@
           <a:p>
             <a:fld id="{109C872D-39A9-4065-8BF3-6A613116E2A1}" type="slidenum">
               <a:rPr lang="ko-KR" altLang="en-US" smtClean="0"/>
-              <a:t>47</a:t>
+              <a:t>48</a:t>
             </a:fld>
             <a:endParaRPr lang="ko-KR" altLang="en-US"/>
           </a:p>
@@ -37818,7 +37936,7 @@
 </p:sld>
 </file>
 
-<file path=ppt/slides/slide48.xml><?xml version="1.0" encoding="utf-8"?>
+<file path=ppt/slides/slide49.xml><?xml version="1.0" encoding="utf-8"?>
 <p:sld xmlns:a="http://schemas.openxmlformats.org/drawingml/2006/main" xmlns:r="http://schemas.openxmlformats.org/officeDocument/2006/relationships" xmlns:p="http://schemas.openxmlformats.org/presentationml/2006/main">
   <p:cSld>
     <p:spTree>
@@ -37892,7 +38010,7 @@
           <a:p>
             <a:fld id="{109C872D-39A9-4065-8BF3-6A613116E2A1}" type="slidenum">
               <a:rPr lang="ko-KR" altLang="en-US" smtClean="0"/>
-              <a:t>48</a:t>
+              <a:t>49</a:t>
             </a:fld>
             <a:endParaRPr lang="ko-KR" altLang="en-US"/>
           </a:p>
@@ -38148,7 +38266,385 @@
 </p:sld>
 </file>
 
-<file path=ppt/slides/slide49.xml><?xml version="1.0" encoding="utf-8"?>
+<file path=ppt/slides/slide5.xml><?xml version="1.0" encoding="utf-8"?>
+<p:sld xmlns:a="http://schemas.openxmlformats.org/drawingml/2006/main" xmlns:r="http://schemas.openxmlformats.org/officeDocument/2006/relationships" xmlns:p="http://schemas.openxmlformats.org/presentationml/2006/main">
+  <p:cSld>
+    <p:spTree>
+      <p:nvGrpSpPr>
+        <p:cNvPr id="1" name="">
+          <a:extLst>
+            <a:ext uri="{FF2B5EF4-FFF2-40B4-BE49-F238E27FC236}">
+              <a16:creationId xmlns:a16="http://schemas.microsoft.com/office/drawing/2014/main" id="{397CA923-B4DD-A907-2D8B-D6044F6F5282}"/>
+            </a:ext>
+          </a:extLst>
+        </p:cNvPr>
+        <p:cNvGrpSpPr/>
+        <p:nvPr/>
+      </p:nvGrpSpPr>
+      <p:grpSpPr>
+        <a:xfrm>
+          <a:off x="0" y="0"/>
+          <a:ext cx="0" cy="0"/>
+          <a:chOff x="0" y="0"/>
+          <a:chExt cx="0" cy="0"/>
+        </a:xfrm>
+      </p:grpSpPr>
+      <p:sp>
+        <p:nvSpPr>
+          <p:cNvPr id="2" name="제목 1">
+            <a:extLst>
+              <a:ext uri="{FF2B5EF4-FFF2-40B4-BE49-F238E27FC236}">
+                <a16:creationId xmlns:a16="http://schemas.microsoft.com/office/drawing/2014/main" id="{5AE1A0F4-CC65-8E27-4A59-54417250F3EB}"/>
+              </a:ext>
+            </a:extLst>
+          </p:cNvPr>
+          <p:cNvSpPr>
+            <a:spLocks noGrp="1"/>
+          </p:cNvSpPr>
+          <p:nvPr>
+            <p:ph type="title"/>
+          </p:nvPr>
+        </p:nvSpPr>
+        <p:spPr/>
+        <p:txBody>
+          <a:bodyPr/>
+          <a:lstStyle/>
+          <a:p>
+            <a:r>
+              <a:rPr lang="ko-KR" altLang="en-US" dirty="0"/>
+              <a:t>서론</a:t>
+            </a:r>
+          </a:p>
+        </p:txBody>
+      </p:sp>
+      <p:sp>
+        <p:nvSpPr>
+          <p:cNvPr id="4" name="슬라이드 번호 개체 틀 3">
+            <a:extLst>
+              <a:ext uri="{FF2B5EF4-FFF2-40B4-BE49-F238E27FC236}">
+                <a16:creationId xmlns:a16="http://schemas.microsoft.com/office/drawing/2014/main" id="{2D05026A-C2F6-E1CD-95EA-4269B6F0A911}"/>
+              </a:ext>
+            </a:extLst>
+          </p:cNvPr>
+          <p:cNvSpPr>
+            <a:spLocks noGrp="1"/>
+          </p:cNvSpPr>
+          <p:nvPr>
+            <p:ph type="sldNum" sz="quarter" idx="12"/>
+          </p:nvPr>
+        </p:nvSpPr>
+        <p:spPr/>
+        <p:txBody>
+          <a:bodyPr/>
+          <a:lstStyle/>
+          <a:p>
+            <a:fld id="{109C872D-39A9-4065-8BF3-6A613116E2A1}" type="slidenum">
+              <a:rPr lang="ko-KR" altLang="en-US" smtClean="0"/>
+              <a:t>5</a:t>
+            </a:fld>
+            <a:endParaRPr lang="ko-KR" altLang="en-US"/>
+          </a:p>
+        </p:txBody>
+      </p:sp>
+      <p:sp>
+        <p:nvSpPr>
+          <p:cNvPr id="3" name="TextBox 2">
+            <a:extLst>
+              <a:ext uri="{FF2B5EF4-FFF2-40B4-BE49-F238E27FC236}">
+                <a16:creationId xmlns:a16="http://schemas.microsoft.com/office/drawing/2014/main" id="{B48FC786-BA6B-5C03-44D8-6D9CE0578FA6}"/>
+              </a:ext>
+            </a:extLst>
+          </p:cNvPr>
+          <p:cNvSpPr txBox="1"/>
+          <p:nvPr/>
+        </p:nvSpPr>
+        <p:spPr>
+          <a:xfrm>
+            <a:off x="288790" y="958844"/>
+            <a:ext cx="11118453" cy="5215338"/>
+          </a:xfrm>
+          <a:prstGeom prst="rect">
+            <a:avLst/>
+          </a:prstGeom>
+          <a:noFill/>
+        </p:spPr>
+        <p:txBody>
+          <a:bodyPr wrap="square" rtlCol="0" anchor="t">
+            <a:spAutoFit/>
+          </a:bodyPr>
+          <a:lstStyle/>
+          <a:p>
+            <a:pPr marL="377825" indent="-285750">
+              <a:lnSpc>
+                <a:spcPct val="150000"/>
+              </a:lnSpc>
+              <a:buFont typeface="Arial" panose="020B0604020202020204" pitchFamily="34" charset="0"/>
+              <a:buChar char="•"/>
+            </a:pPr>
+            <a:r>
+              <a:rPr lang="en-US" altLang="ko-KR" sz="1600" dirty="0"/>
+              <a:t>20</a:t>
+            </a:r>
+            <a:r>
+              <a:rPr lang="ko-KR" altLang="en-US" sz="1600" dirty="0"/>
+              <a:t>세기 중반 이후 석유 및 천연가스와 같은</a:t>
+            </a:r>
+            <a:r>
+              <a:rPr lang="en-US" altLang="ko-KR" sz="1600" dirty="0"/>
+              <a:t>, </a:t>
+            </a:r>
+            <a:r>
+              <a:rPr lang="ko-KR" altLang="en-US" sz="1600" dirty="0"/>
+              <a:t>보다 높은 에너지 밀도와 유연성을 지닌 에너지원의 등장</a:t>
+            </a:r>
+            <a:r>
+              <a:rPr lang="en-US" altLang="ko-KR" sz="1600" dirty="0"/>
+              <a:t>, </a:t>
+            </a:r>
+            <a:r>
+              <a:rPr lang="ko-KR" altLang="en-US" sz="1600" dirty="0"/>
+              <a:t>그리고 원자력 발전의 도입은 석탄의 상대적 위상을 점차 약화시키는 계기가 되었다</a:t>
+            </a:r>
+            <a:r>
+              <a:rPr lang="en-US" altLang="ko-KR" sz="1600" dirty="0"/>
+              <a:t>.</a:t>
+            </a:r>
+          </a:p>
+          <a:p>
+            <a:pPr marL="835025" lvl="1" indent="-285750">
+              <a:lnSpc>
+                <a:spcPct val="150000"/>
+              </a:lnSpc>
+              <a:buFont typeface="Wingdings" panose="05000000000000000000" pitchFamily="2" charset="2"/>
+              <a:buChar char="ü"/>
+            </a:pPr>
+            <a:r>
+              <a:rPr lang="ko-KR" altLang="en-US" sz="1600" dirty="0"/>
+              <a:t>더욱이</a:t>
+            </a:r>
+            <a:r>
+              <a:rPr lang="en-US" altLang="ko-KR" sz="1600" dirty="0"/>
+              <a:t>, </a:t>
+            </a:r>
+            <a:r>
+              <a:rPr lang="ko-KR" altLang="en-US" sz="1600" dirty="0"/>
+              <a:t>석탄 채굴 및 연소 과정에서의 대기오염</a:t>
+            </a:r>
+            <a:r>
+              <a:rPr lang="en-US" altLang="ko-KR" sz="1600" dirty="0"/>
+              <a:t>, </a:t>
+            </a:r>
+            <a:r>
+              <a:rPr lang="ko-KR" altLang="en-US" sz="1600" dirty="0"/>
+              <a:t>온실가스 배출</a:t>
+            </a:r>
+            <a:r>
+              <a:rPr lang="en-US" altLang="ko-KR" sz="1600" dirty="0"/>
+              <a:t>, </a:t>
+            </a:r>
+            <a:r>
+              <a:rPr lang="ko-KR" altLang="en-US" sz="1600" dirty="0"/>
+              <a:t>광산 노동자의 건강 문제 등 부정적 외부효과는 석탄 산업에 대한 국제사회의 비판적 시각을 </a:t>
+            </a:r>
+            <a:r>
+              <a:rPr lang="ko-KR" altLang="en-US" sz="1600" dirty="0" err="1"/>
+              <a:t>강화시켰으며</a:t>
+            </a:r>
+            <a:r>
+              <a:rPr lang="en-US" altLang="ko-KR" sz="1600" dirty="0"/>
+              <a:t>, </a:t>
+            </a:r>
+            <a:r>
+              <a:rPr lang="ko-KR" altLang="en-US" sz="1600" dirty="0"/>
+              <a:t>환경 규제의 강화와 탈탄소화 전환을 촉진하는 요인으로 작용하였다</a:t>
+            </a:r>
+            <a:r>
+              <a:rPr lang="en-US" altLang="ko-KR" sz="1600" dirty="0"/>
+              <a:t>. </a:t>
+            </a:r>
+          </a:p>
+          <a:p>
+            <a:pPr marL="835025" lvl="1" indent="-285750">
+              <a:lnSpc>
+                <a:spcPct val="150000"/>
+              </a:lnSpc>
+              <a:buFont typeface="Wingdings" panose="05000000000000000000" pitchFamily="2" charset="2"/>
+              <a:buChar char="ü"/>
+            </a:pPr>
+            <a:r>
+              <a:rPr lang="ko-KR" altLang="en-US" sz="1600" dirty="0"/>
+              <a:t>기후변화 대응을 위한 글로벌 협약과 국가별 탄소중립 목표는 석탄의 단계적 축소를 </a:t>
+            </a:r>
+            <a:r>
+              <a:rPr lang="ko-KR" altLang="en-US" sz="1600" dirty="0" err="1"/>
+              <a:t>가속화시키고</a:t>
+            </a:r>
+            <a:r>
+              <a:rPr lang="ko-KR" altLang="en-US" sz="1600" dirty="0"/>
+              <a:t> 있다</a:t>
+            </a:r>
+            <a:r>
+              <a:rPr lang="en-US" altLang="ko-KR" sz="1600"/>
+              <a:t>.</a:t>
+            </a:r>
+          </a:p>
+          <a:p>
+            <a:pPr marL="377825" indent="-285750">
+              <a:lnSpc>
+                <a:spcPct val="150000"/>
+              </a:lnSpc>
+              <a:buFont typeface="Arial" panose="020B0604020202020204" pitchFamily="34" charset="0"/>
+              <a:buChar char="•"/>
+            </a:pPr>
+            <a:endParaRPr lang="en-US" altLang="ko-KR" sz="1600" dirty="0"/>
+          </a:p>
+          <a:p>
+            <a:pPr marL="377825" indent="-285750">
+              <a:lnSpc>
+                <a:spcPct val="150000"/>
+              </a:lnSpc>
+              <a:buFont typeface="Arial" panose="020B0604020202020204" pitchFamily="34" charset="0"/>
+              <a:buChar char="•"/>
+            </a:pPr>
+            <a:endParaRPr lang="en-US" altLang="ko-KR" sz="1600" dirty="0"/>
+          </a:p>
+          <a:p>
+            <a:pPr marL="377825" indent="-285750">
+              <a:lnSpc>
+                <a:spcPct val="150000"/>
+              </a:lnSpc>
+              <a:buFont typeface="Arial" panose="020B0604020202020204" pitchFamily="34" charset="0"/>
+              <a:buChar char="•"/>
+            </a:pPr>
+            <a:r>
+              <a:rPr lang="ko-KR" altLang="en-US" sz="1600" dirty="0"/>
+              <a:t>그럼에도 불구하고</a:t>
+            </a:r>
+            <a:r>
+              <a:rPr lang="en-US" altLang="ko-KR" sz="1600" dirty="0"/>
+              <a:t>, </a:t>
+            </a:r>
+            <a:r>
+              <a:rPr lang="ko-KR" altLang="en-US" sz="1600" dirty="0"/>
+              <a:t>석탄은 여전히 세계 에너지 믹스의 약 </a:t>
+            </a:r>
+            <a:r>
+              <a:rPr lang="en-US" altLang="ko-KR" sz="1600" dirty="0"/>
+              <a:t>25~30%</a:t>
+            </a:r>
+            <a:r>
+              <a:rPr lang="ko-KR" altLang="en-US" sz="1600" dirty="0"/>
+              <a:t>를 차지하는 주요 자원으로 남아 있다</a:t>
+            </a:r>
+            <a:r>
+              <a:rPr lang="en-US" altLang="ko-KR" sz="1600" dirty="0"/>
+              <a:t>.</a:t>
+            </a:r>
+          </a:p>
+          <a:p>
+            <a:pPr marL="835025" lvl="1" indent="-285750">
+              <a:lnSpc>
+                <a:spcPct val="150000"/>
+              </a:lnSpc>
+              <a:buFont typeface="Wingdings" panose="05000000000000000000" pitchFamily="2" charset="2"/>
+              <a:buChar char="ü"/>
+            </a:pPr>
+            <a:r>
+              <a:rPr lang="ko-KR" altLang="en-US" sz="1600" dirty="0"/>
+              <a:t>전력 수급의 신뢰성과 가격경쟁력을 중시하는 개발도상국에서는 에너지 안보 확보와 경제성 측면에서 여전히 전략적인 에너지원으로 활용되고 있다</a:t>
+            </a:r>
+            <a:r>
+              <a:rPr lang="en-US" altLang="ko-KR" sz="1600" dirty="0"/>
+              <a:t>.</a:t>
+            </a:r>
+          </a:p>
+          <a:p>
+            <a:pPr marL="835025" lvl="1" indent="-285750">
+              <a:lnSpc>
+                <a:spcPct val="150000"/>
+              </a:lnSpc>
+              <a:buFont typeface="Wingdings" panose="05000000000000000000" pitchFamily="2" charset="2"/>
+              <a:buChar char="ü"/>
+            </a:pPr>
+            <a:endParaRPr lang="en-US" altLang="ko-KR" sz="1600" dirty="0"/>
+          </a:p>
+          <a:p>
+            <a:pPr marL="377825" indent="-285750">
+              <a:lnSpc>
+                <a:spcPct val="150000"/>
+              </a:lnSpc>
+              <a:buFont typeface="Arial" panose="020B0604020202020204" pitchFamily="34" charset="0"/>
+              <a:buChar char="•"/>
+            </a:pPr>
+            <a:r>
+              <a:rPr lang="ko-KR" altLang="en-US" sz="1600" dirty="0"/>
+              <a:t>현대의 석탄시장은 공급망 리스크</a:t>
+            </a:r>
+            <a:r>
+              <a:rPr lang="en-US" altLang="ko-KR" sz="1600" dirty="0"/>
+              <a:t>, </a:t>
+            </a:r>
+            <a:r>
+              <a:rPr lang="ko-KR" altLang="en-US" sz="1600" dirty="0"/>
+              <a:t>지정학 변수</a:t>
+            </a:r>
+            <a:r>
+              <a:rPr lang="en-US" altLang="ko-KR" sz="1600" dirty="0"/>
+              <a:t>, </a:t>
+            </a:r>
+            <a:r>
+              <a:rPr lang="ko-KR" altLang="en-US" sz="1600" dirty="0" err="1"/>
+              <a:t>탈석탄</a:t>
+            </a:r>
+            <a:r>
+              <a:rPr lang="ko-KR" altLang="en-US" sz="1600" dirty="0"/>
+              <a:t> 정책과의 충돌</a:t>
+            </a:r>
+            <a:r>
+              <a:rPr lang="en-US" altLang="ko-KR" sz="1600" dirty="0"/>
+              <a:t>, </a:t>
+            </a:r>
+            <a:r>
+              <a:rPr lang="ko-KR" altLang="en-US" sz="1600" dirty="0"/>
+              <a:t>청정기술 도입</a:t>
+            </a:r>
+            <a:r>
+              <a:rPr lang="en-US" altLang="ko-KR" sz="1600" dirty="0"/>
+              <a:t>, </a:t>
+            </a:r>
+            <a:r>
+              <a:rPr lang="ko-KR" altLang="en-US" sz="1600" dirty="0"/>
+              <a:t>국제 금융의 탈석탄화 흐름</a:t>
+            </a:r>
+            <a:r>
+              <a:rPr lang="en-US" altLang="ko-KR" sz="1600" dirty="0"/>
+              <a:t> </a:t>
+            </a:r>
+            <a:r>
+              <a:rPr lang="ko-KR" altLang="en-US" sz="1600" dirty="0"/>
+              <a:t>등 복합적인 요소가 작용하는 불확실성으로 특징지어진다</a:t>
+            </a:r>
+            <a:r>
+              <a:rPr lang="en-US" altLang="ko-KR" sz="1600" dirty="0"/>
+              <a:t>.</a:t>
+            </a:r>
+          </a:p>
+        </p:txBody>
+      </p:sp>
+    </p:spTree>
+    <p:extLst>
+      <p:ext uri="{BB962C8B-B14F-4D97-AF65-F5344CB8AC3E}">
+        <p14:creationId xmlns:p14="http://schemas.microsoft.com/office/powerpoint/2010/main" val="3817818921"/>
+      </p:ext>
+    </p:extLst>
+  </p:cSld>
+  <p:clrMapOvr>
+    <a:masterClrMapping/>
+  </p:clrMapOvr>
+</p:sld>
+</file>
+
+<file path=ppt/slides/slide50.xml><?xml version="1.0" encoding="utf-8"?>
 <p:sld xmlns:a="http://schemas.openxmlformats.org/drawingml/2006/main" xmlns:r="http://schemas.openxmlformats.org/officeDocument/2006/relationships" xmlns:p="http://schemas.openxmlformats.org/presentationml/2006/main">
   <p:cSld>
     <p:spTree>
@@ -38231,7 +38727,7 @@
           <a:p>
             <a:fld id="{109C872D-39A9-4065-8BF3-6A613116E2A1}" type="slidenum">
               <a:rPr lang="ko-KR" altLang="en-US" smtClean="0"/>
-              <a:t>49</a:t>
+              <a:t>50</a:t>
             </a:fld>
             <a:endParaRPr lang="ko-KR" altLang="en-US"/>
           </a:p>
@@ -38291,385 +38787,7 @@
 </p:sld>
 </file>
 
-<file path=ppt/slides/slide5.xml><?xml version="1.0" encoding="utf-8"?>
-<p:sld xmlns:a="http://schemas.openxmlformats.org/drawingml/2006/main" xmlns:r="http://schemas.openxmlformats.org/officeDocument/2006/relationships" xmlns:p="http://schemas.openxmlformats.org/presentationml/2006/main">
-  <p:cSld>
-    <p:spTree>
-      <p:nvGrpSpPr>
-        <p:cNvPr id="1" name="">
-          <a:extLst>
-            <a:ext uri="{FF2B5EF4-FFF2-40B4-BE49-F238E27FC236}">
-              <a16:creationId xmlns:a16="http://schemas.microsoft.com/office/drawing/2014/main" id="{397CA923-B4DD-A907-2D8B-D6044F6F5282}"/>
-            </a:ext>
-          </a:extLst>
-        </p:cNvPr>
-        <p:cNvGrpSpPr/>
-        <p:nvPr/>
-      </p:nvGrpSpPr>
-      <p:grpSpPr>
-        <a:xfrm>
-          <a:off x="0" y="0"/>
-          <a:ext cx="0" cy="0"/>
-          <a:chOff x="0" y="0"/>
-          <a:chExt cx="0" cy="0"/>
-        </a:xfrm>
-      </p:grpSpPr>
-      <p:sp>
-        <p:nvSpPr>
-          <p:cNvPr id="2" name="제목 1">
-            <a:extLst>
-              <a:ext uri="{FF2B5EF4-FFF2-40B4-BE49-F238E27FC236}">
-                <a16:creationId xmlns:a16="http://schemas.microsoft.com/office/drawing/2014/main" id="{5AE1A0F4-CC65-8E27-4A59-54417250F3EB}"/>
-              </a:ext>
-            </a:extLst>
-          </p:cNvPr>
-          <p:cNvSpPr>
-            <a:spLocks noGrp="1"/>
-          </p:cNvSpPr>
-          <p:nvPr>
-            <p:ph type="title"/>
-          </p:nvPr>
-        </p:nvSpPr>
-        <p:spPr/>
-        <p:txBody>
-          <a:bodyPr/>
-          <a:lstStyle/>
-          <a:p>
-            <a:r>
-              <a:rPr lang="ko-KR" altLang="en-US" dirty="0"/>
-              <a:t>서론</a:t>
-            </a:r>
-          </a:p>
-        </p:txBody>
-      </p:sp>
-      <p:sp>
-        <p:nvSpPr>
-          <p:cNvPr id="4" name="슬라이드 번호 개체 틀 3">
-            <a:extLst>
-              <a:ext uri="{FF2B5EF4-FFF2-40B4-BE49-F238E27FC236}">
-                <a16:creationId xmlns:a16="http://schemas.microsoft.com/office/drawing/2014/main" id="{2D05026A-C2F6-E1CD-95EA-4269B6F0A911}"/>
-              </a:ext>
-            </a:extLst>
-          </p:cNvPr>
-          <p:cNvSpPr>
-            <a:spLocks noGrp="1"/>
-          </p:cNvSpPr>
-          <p:nvPr>
-            <p:ph type="sldNum" sz="quarter" idx="12"/>
-          </p:nvPr>
-        </p:nvSpPr>
-        <p:spPr/>
-        <p:txBody>
-          <a:bodyPr/>
-          <a:lstStyle/>
-          <a:p>
-            <a:fld id="{109C872D-39A9-4065-8BF3-6A613116E2A1}" type="slidenum">
-              <a:rPr lang="ko-KR" altLang="en-US" smtClean="0"/>
-              <a:t>5</a:t>
-            </a:fld>
-            <a:endParaRPr lang="ko-KR" altLang="en-US"/>
-          </a:p>
-        </p:txBody>
-      </p:sp>
-      <p:sp>
-        <p:nvSpPr>
-          <p:cNvPr id="3" name="TextBox 2">
-            <a:extLst>
-              <a:ext uri="{FF2B5EF4-FFF2-40B4-BE49-F238E27FC236}">
-                <a16:creationId xmlns:a16="http://schemas.microsoft.com/office/drawing/2014/main" id="{B48FC786-BA6B-5C03-44D8-6D9CE0578FA6}"/>
-              </a:ext>
-            </a:extLst>
-          </p:cNvPr>
-          <p:cNvSpPr txBox="1"/>
-          <p:nvPr/>
-        </p:nvSpPr>
-        <p:spPr>
-          <a:xfrm>
-            <a:off x="288790" y="958844"/>
-            <a:ext cx="11118453" cy="5215338"/>
-          </a:xfrm>
-          <a:prstGeom prst="rect">
-            <a:avLst/>
-          </a:prstGeom>
-          <a:noFill/>
-        </p:spPr>
-        <p:txBody>
-          <a:bodyPr wrap="square" rtlCol="0" anchor="t">
-            <a:spAutoFit/>
-          </a:bodyPr>
-          <a:lstStyle/>
-          <a:p>
-            <a:pPr marL="377825" indent="-285750">
-              <a:lnSpc>
-                <a:spcPct val="150000"/>
-              </a:lnSpc>
-              <a:buFont typeface="Arial" panose="020B0604020202020204" pitchFamily="34" charset="0"/>
-              <a:buChar char="•"/>
-            </a:pPr>
-            <a:r>
-              <a:rPr lang="en-US" altLang="ko-KR" sz="1600" dirty="0"/>
-              <a:t>20</a:t>
-            </a:r>
-            <a:r>
-              <a:rPr lang="ko-KR" altLang="en-US" sz="1600" dirty="0"/>
-              <a:t>세기 중반 이후 석유 및 천연가스와 같은</a:t>
-            </a:r>
-            <a:r>
-              <a:rPr lang="en-US" altLang="ko-KR" sz="1600" dirty="0"/>
-              <a:t>, </a:t>
-            </a:r>
-            <a:r>
-              <a:rPr lang="ko-KR" altLang="en-US" sz="1600" dirty="0"/>
-              <a:t>보다 높은 에너지 밀도와 유연성을 지닌 에너지원의 등장</a:t>
-            </a:r>
-            <a:r>
-              <a:rPr lang="en-US" altLang="ko-KR" sz="1600" dirty="0"/>
-              <a:t>, </a:t>
-            </a:r>
-            <a:r>
-              <a:rPr lang="ko-KR" altLang="en-US" sz="1600" dirty="0"/>
-              <a:t>그리고 원자력 발전의 도입은 석탄의 상대적 위상을 점차 약화시키는 계기가 되었다</a:t>
-            </a:r>
-            <a:r>
-              <a:rPr lang="en-US" altLang="ko-KR" sz="1600" dirty="0"/>
-              <a:t>.</a:t>
-            </a:r>
-          </a:p>
-          <a:p>
-            <a:pPr marL="835025" lvl="1" indent="-285750">
-              <a:lnSpc>
-                <a:spcPct val="150000"/>
-              </a:lnSpc>
-              <a:buFont typeface="Wingdings" panose="05000000000000000000" pitchFamily="2" charset="2"/>
-              <a:buChar char="ü"/>
-            </a:pPr>
-            <a:r>
-              <a:rPr lang="ko-KR" altLang="en-US" sz="1600" dirty="0"/>
-              <a:t>더욱이</a:t>
-            </a:r>
-            <a:r>
-              <a:rPr lang="en-US" altLang="ko-KR" sz="1600" dirty="0"/>
-              <a:t>, </a:t>
-            </a:r>
-            <a:r>
-              <a:rPr lang="ko-KR" altLang="en-US" sz="1600" dirty="0"/>
-              <a:t>석탄 채굴 및 연소 과정에서의 대기오염</a:t>
-            </a:r>
-            <a:r>
-              <a:rPr lang="en-US" altLang="ko-KR" sz="1600" dirty="0"/>
-              <a:t>, </a:t>
-            </a:r>
-            <a:r>
-              <a:rPr lang="ko-KR" altLang="en-US" sz="1600" dirty="0"/>
-              <a:t>온실가스 배출</a:t>
-            </a:r>
-            <a:r>
-              <a:rPr lang="en-US" altLang="ko-KR" sz="1600" dirty="0"/>
-              <a:t>, </a:t>
-            </a:r>
-            <a:r>
-              <a:rPr lang="ko-KR" altLang="en-US" sz="1600" dirty="0"/>
-              <a:t>광산 노동자의 건강 문제 등 부정적 외부효과는 석탄 산업에 대한 국제사회의 비판적 시각을 </a:t>
-            </a:r>
-            <a:r>
-              <a:rPr lang="ko-KR" altLang="en-US" sz="1600" dirty="0" err="1"/>
-              <a:t>강화시켰으며</a:t>
-            </a:r>
-            <a:r>
-              <a:rPr lang="en-US" altLang="ko-KR" sz="1600" dirty="0"/>
-              <a:t>, </a:t>
-            </a:r>
-            <a:r>
-              <a:rPr lang="ko-KR" altLang="en-US" sz="1600" dirty="0"/>
-              <a:t>환경 규제의 강화와 탈탄소화 전환을 촉진하는 요인으로 작용하였다</a:t>
-            </a:r>
-            <a:r>
-              <a:rPr lang="en-US" altLang="ko-KR" sz="1600" dirty="0"/>
-              <a:t>. </a:t>
-            </a:r>
-          </a:p>
-          <a:p>
-            <a:pPr marL="835025" lvl="1" indent="-285750">
-              <a:lnSpc>
-                <a:spcPct val="150000"/>
-              </a:lnSpc>
-              <a:buFont typeface="Wingdings" panose="05000000000000000000" pitchFamily="2" charset="2"/>
-              <a:buChar char="ü"/>
-            </a:pPr>
-            <a:r>
-              <a:rPr lang="ko-KR" altLang="en-US" sz="1600" dirty="0"/>
-              <a:t>기후변화 대응을 위한 글로벌 협약과 국가별 탄소중립 목표는 석탄의 단계적 축소를 </a:t>
-            </a:r>
-            <a:r>
-              <a:rPr lang="ko-KR" altLang="en-US" sz="1600" dirty="0" err="1"/>
-              <a:t>가속화시키고</a:t>
-            </a:r>
-            <a:r>
-              <a:rPr lang="ko-KR" altLang="en-US" sz="1600" dirty="0"/>
-              <a:t> 있다</a:t>
-            </a:r>
-            <a:r>
-              <a:rPr lang="en-US" altLang="ko-KR" sz="1600"/>
-              <a:t>.</a:t>
-            </a:r>
-          </a:p>
-          <a:p>
-            <a:pPr marL="377825" indent="-285750">
-              <a:lnSpc>
-                <a:spcPct val="150000"/>
-              </a:lnSpc>
-              <a:buFont typeface="Arial" panose="020B0604020202020204" pitchFamily="34" charset="0"/>
-              <a:buChar char="•"/>
-            </a:pPr>
-            <a:endParaRPr lang="en-US" altLang="ko-KR" sz="1600" dirty="0"/>
-          </a:p>
-          <a:p>
-            <a:pPr marL="377825" indent="-285750">
-              <a:lnSpc>
-                <a:spcPct val="150000"/>
-              </a:lnSpc>
-              <a:buFont typeface="Arial" panose="020B0604020202020204" pitchFamily="34" charset="0"/>
-              <a:buChar char="•"/>
-            </a:pPr>
-            <a:endParaRPr lang="en-US" altLang="ko-KR" sz="1600" dirty="0"/>
-          </a:p>
-          <a:p>
-            <a:pPr marL="377825" indent="-285750">
-              <a:lnSpc>
-                <a:spcPct val="150000"/>
-              </a:lnSpc>
-              <a:buFont typeface="Arial" panose="020B0604020202020204" pitchFamily="34" charset="0"/>
-              <a:buChar char="•"/>
-            </a:pPr>
-            <a:r>
-              <a:rPr lang="ko-KR" altLang="en-US" sz="1600" dirty="0"/>
-              <a:t>그럼에도 불구하고</a:t>
-            </a:r>
-            <a:r>
-              <a:rPr lang="en-US" altLang="ko-KR" sz="1600" dirty="0"/>
-              <a:t>, </a:t>
-            </a:r>
-            <a:r>
-              <a:rPr lang="ko-KR" altLang="en-US" sz="1600" dirty="0"/>
-              <a:t>석탄은 여전히 세계 에너지 믹스의 약 </a:t>
-            </a:r>
-            <a:r>
-              <a:rPr lang="en-US" altLang="ko-KR" sz="1600" dirty="0"/>
-              <a:t>25~30%</a:t>
-            </a:r>
-            <a:r>
-              <a:rPr lang="ko-KR" altLang="en-US" sz="1600" dirty="0"/>
-              <a:t>를 차지하는 주요 자원으로 남아 있다</a:t>
-            </a:r>
-            <a:r>
-              <a:rPr lang="en-US" altLang="ko-KR" sz="1600" dirty="0"/>
-              <a:t>.</a:t>
-            </a:r>
-          </a:p>
-          <a:p>
-            <a:pPr marL="835025" lvl="1" indent="-285750">
-              <a:lnSpc>
-                <a:spcPct val="150000"/>
-              </a:lnSpc>
-              <a:buFont typeface="Wingdings" panose="05000000000000000000" pitchFamily="2" charset="2"/>
-              <a:buChar char="ü"/>
-            </a:pPr>
-            <a:r>
-              <a:rPr lang="ko-KR" altLang="en-US" sz="1600" dirty="0"/>
-              <a:t>전력 수급의 신뢰성과 가격경쟁력을 중시하는 개발도상국에서는 에너지 안보 확보와 경제성 측면에서 여전히 전략적인 에너지원으로 활용되고 있다</a:t>
-            </a:r>
-            <a:r>
-              <a:rPr lang="en-US" altLang="ko-KR" sz="1600" dirty="0"/>
-              <a:t>.</a:t>
-            </a:r>
-          </a:p>
-          <a:p>
-            <a:pPr marL="835025" lvl="1" indent="-285750">
-              <a:lnSpc>
-                <a:spcPct val="150000"/>
-              </a:lnSpc>
-              <a:buFont typeface="Wingdings" panose="05000000000000000000" pitchFamily="2" charset="2"/>
-              <a:buChar char="ü"/>
-            </a:pPr>
-            <a:endParaRPr lang="en-US" altLang="ko-KR" sz="1600" dirty="0"/>
-          </a:p>
-          <a:p>
-            <a:pPr marL="377825" indent="-285750">
-              <a:lnSpc>
-                <a:spcPct val="150000"/>
-              </a:lnSpc>
-              <a:buFont typeface="Arial" panose="020B0604020202020204" pitchFamily="34" charset="0"/>
-              <a:buChar char="•"/>
-            </a:pPr>
-            <a:r>
-              <a:rPr lang="ko-KR" altLang="en-US" sz="1600" dirty="0"/>
-              <a:t>현대의 석탄시장은 공급망 리스크</a:t>
-            </a:r>
-            <a:r>
-              <a:rPr lang="en-US" altLang="ko-KR" sz="1600" dirty="0"/>
-              <a:t>, </a:t>
-            </a:r>
-            <a:r>
-              <a:rPr lang="ko-KR" altLang="en-US" sz="1600" dirty="0"/>
-              <a:t>지정학 변수</a:t>
-            </a:r>
-            <a:r>
-              <a:rPr lang="en-US" altLang="ko-KR" sz="1600" dirty="0"/>
-              <a:t>, </a:t>
-            </a:r>
-            <a:r>
-              <a:rPr lang="ko-KR" altLang="en-US" sz="1600" dirty="0" err="1"/>
-              <a:t>탈석탄</a:t>
-            </a:r>
-            <a:r>
-              <a:rPr lang="ko-KR" altLang="en-US" sz="1600" dirty="0"/>
-              <a:t> 정책과의 충돌</a:t>
-            </a:r>
-            <a:r>
-              <a:rPr lang="en-US" altLang="ko-KR" sz="1600" dirty="0"/>
-              <a:t>, </a:t>
-            </a:r>
-            <a:r>
-              <a:rPr lang="ko-KR" altLang="en-US" sz="1600" dirty="0"/>
-              <a:t>청정기술 도입</a:t>
-            </a:r>
-            <a:r>
-              <a:rPr lang="en-US" altLang="ko-KR" sz="1600" dirty="0"/>
-              <a:t>, </a:t>
-            </a:r>
-            <a:r>
-              <a:rPr lang="ko-KR" altLang="en-US" sz="1600" dirty="0"/>
-              <a:t>국제 금융의 탈석탄화 흐름</a:t>
-            </a:r>
-            <a:r>
-              <a:rPr lang="en-US" altLang="ko-KR" sz="1600" dirty="0"/>
-              <a:t> </a:t>
-            </a:r>
-            <a:r>
-              <a:rPr lang="ko-KR" altLang="en-US" sz="1600" dirty="0"/>
-              <a:t>등 복합적인 요소가 작용하는 불확실성으로 특징지어진다</a:t>
-            </a:r>
-            <a:r>
-              <a:rPr lang="en-US" altLang="ko-KR" sz="1600" dirty="0"/>
-              <a:t>.</a:t>
-            </a:r>
-          </a:p>
-        </p:txBody>
-      </p:sp>
-    </p:spTree>
-    <p:extLst>
-      <p:ext uri="{BB962C8B-B14F-4D97-AF65-F5344CB8AC3E}">
-        <p14:creationId xmlns:p14="http://schemas.microsoft.com/office/powerpoint/2010/main" val="3817818921"/>
-      </p:ext>
-    </p:extLst>
-  </p:cSld>
-  <p:clrMapOvr>
-    <a:masterClrMapping/>
-  </p:clrMapOvr>
-</p:sld>
-</file>
-
-<file path=ppt/slides/slide50.xml><?xml version="1.0" encoding="utf-8"?>
+<file path=ppt/slides/slide51.xml><?xml version="1.0" encoding="utf-8"?>
 <p:sld xmlns:a="http://schemas.openxmlformats.org/drawingml/2006/main" xmlns:r="http://schemas.openxmlformats.org/officeDocument/2006/relationships" xmlns:p="http://schemas.openxmlformats.org/presentationml/2006/main">
   <p:cSld>
     <p:spTree>
@@ -38743,7 +38861,7 @@
           <a:p>
             <a:fld id="{109C872D-39A9-4065-8BF3-6A613116E2A1}" type="slidenum">
               <a:rPr lang="ko-KR" altLang="en-US" smtClean="0"/>
-              <a:t>50</a:t>
+              <a:t>51</a:t>
             </a:fld>
             <a:endParaRPr lang="ko-KR" altLang="en-US"/>
           </a:p>
@@ -39048,7 +39166,7 @@
 </p:sld>
 </file>
 
-<file path=ppt/slides/slide51.xml><?xml version="1.0" encoding="utf-8"?>
+<file path=ppt/slides/slide52.xml><?xml version="1.0" encoding="utf-8"?>
 <p:sld xmlns:a="http://schemas.openxmlformats.org/drawingml/2006/main" xmlns:r="http://schemas.openxmlformats.org/officeDocument/2006/relationships" xmlns:p="http://schemas.openxmlformats.org/presentationml/2006/main">
   <p:cSld>
     <p:spTree>
@@ -39122,7 +39240,7 @@
           <a:p>
             <a:fld id="{109C872D-39A9-4065-8BF3-6A613116E2A1}" type="slidenum">
               <a:rPr lang="ko-KR" altLang="en-US" smtClean="0"/>
-              <a:t>51</a:t>
+              <a:t>52</a:t>
             </a:fld>
             <a:endParaRPr lang="ko-KR" altLang="en-US"/>
           </a:p>
@@ -39416,7 +39534,7 @@
 </p:sld>
 </file>
 
-<file path=ppt/slides/slide52.xml><?xml version="1.0" encoding="utf-8"?>
+<file path=ppt/slides/slide53.xml><?xml version="1.0" encoding="utf-8"?>
 <p:sld xmlns:a="http://schemas.openxmlformats.org/drawingml/2006/main" xmlns:r="http://schemas.openxmlformats.org/officeDocument/2006/relationships" xmlns:p="http://schemas.openxmlformats.org/presentationml/2006/main">
   <p:cSld>
     <p:spTree>
@@ -39544,7 +39662,7 @@
           <a:p>
             <a:fld id="{109C872D-39A9-4065-8BF3-6A613116E2A1}" type="slidenum">
               <a:rPr lang="ko-KR" altLang="en-US" smtClean="0"/>
-              <a:t>52</a:t>
+              <a:t>53</a:t>
             </a:fld>
             <a:endParaRPr lang="ko-KR" altLang="en-US"/>
           </a:p>

--- a/에너지경제학/자원에너지경제학_Chapter_5 (석탄).pptx
+++ b/에너지경제학/자원에너지경제학_Chapter_5 (석탄).pptx
@@ -271,7 +271,7 @@
           <a:p>
             <a:fld id="{4A5E00EF-AEA4-43E2-9451-8F9C59A39471}" type="datetimeFigureOut">
               <a:rPr lang="ko-KR" altLang="en-US" smtClean="0"/>
-              <a:t>2026-09-23</a:t>
+              <a:t>2026-09-29</a:t>
             </a:fld>
             <a:endParaRPr lang="ko-KR" altLang="en-US"/>
           </a:p>
@@ -693,7 +693,7 @@
           <a:p>
             <a:fld id="{CD32C56F-BD27-4999-9E6D-D4EACE3DA9F4}" type="datetime1">
               <a:rPr lang="ko-KR" altLang="en-US" smtClean="0"/>
-              <a:t>2026-09-23</a:t>
+              <a:t>2026-09-29</a:t>
             </a:fld>
             <a:endParaRPr lang="ko-KR" altLang="en-US"/>
           </a:p>
@@ -907,7 +907,7 @@
           <a:p>
             <a:fld id="{8EF4A19C-72C8-45CA-8E3F-68A7FA345D6C}" type="datetime1">
               <a:rPr lang="ko-KR" altLang="en-US" smtClean="0"/>
-              <a:t>2026-09-23</a:t>
+              <a:t>2026-09-29</a:t>
             </a:fld>
             <a:endParaRPr lang="ko-KR" altLang="en-US"/>
           </a:p>
@@ -1131,7 +1131,7 @@
           <a:p>
             <a:fld id="{56A175B2-010B-4341-954C-5F8F5C70B124}" type="datetime1">
               <a:rPr lang="ko-KR" altLang="en-US" smtClean="0"/>
-              <a:t>2026-09-23</a:t>
+              <a:t>2026-09-29</a:t>
             </a:fld>
             <a:endParaRPr lang="ko-KR" altLang="en-US"/>
           </a:p>
@@ -1345,7 +1345,7 @@
           <a:p>
             <a:fld id="{16B83F9E-22C9-45CA-9E85-070F1D3EF530}" type="datetime1">
               <a:rPr lang="ko-KR" altLang="en-US" smtClean="0"/>
-              <a:t>2026-09-23</a:t>
+              <a:t>2026-09-29</a:t>
             </a:fld>
             <a:endParaRPr lang="ko-KR" altLang="en-US"/>
           </a:p>
@@ -1636,7 +1636,7 @@
           <a:p>
             <a:fld id="{03278F45-FB3C-4C4D-B89A-7BC3F5F229F6}" type="datetime1">
               <a:rPr lang="ko-KR" altLang="en-US" smtClean="0"/>
-              <a:t>2026-09-23</a:t>
+              <a:t>2026-09-29</a:t>
             </a:fld>
             <a:endParaRPr lang="ko-KR" altLang="en-US"/>
           </a:p>
@@ -2029,7 +2029,7 @@
           <a:p>
             <a:fld id="{38FDAC3C-35A6-415C-9F03-738A6AC328B1}" type="datetime1">
               <a:rPr lang="ko-KR" altLang="en-US" smtClean="0"/>
-              <a:t>2026-09-23</a:t>
+              <a:t>2026-09-29</a:t>
             </a:fld>
             <a:endParaRPr lang="ko-KR" altLang="en-US"/>
           </a:p>
@@ -3623,7 +3623,7 @@
           <a:p>
             <a:fld id="{507A0DF1-AEE6-4B0D-89D2-351E7B3EF65C}" type="datetime1">
               <a:rPr lang="ko-KR" altLang="en-US" smtClean="0"/>
-              <a:t>2026-09-23</a:t>
+              <a:t>2026-09-29</a:t>
             </a:fld>
             <a:endParaRPr lang="ko-KR" altLang="en-US"/>
           </a:p>
@@ -4051,7 +4051,7 @@
           <a:p>
             <a:fld id="{CA93B8C9-630F-4D57-944D-04FD37CECCD3}" type="datetime1">
               <a:rPr lang="ko-KR" altLang="en-US" smtClean="0"/>
-              <a:t>2026-09-23</a:t>
+              <a:t>2026-09-29</a:t>
             </a:fld>
             <a:endParaRPr lang="ko-KR" altLang="en-US"/>
           </a:p>
@@ -4208,7 +4208,7 @@
           <a:p>
             <a:fld id="{E986165A-AC43-4902-9541-874ECD310BA3}" type="datetime1">
               <a:rPr lang="ko-KR" altLang="en-US" smtClean="0"/>
-              <a:t>2026-09-23</a:t>
+              <a:t>2026-09-29</a:t>
             </a:fld>
             <a:endParaRPr lang="ko-KR" altLang="en-US"/>
           </a:p>
@@ -4535,7 +4535,7 @@
           <a:p>
             <a:fld id="{47E6EE6D-2B0E-43A9-87A2-7354CDB998F4}" type="datetime1">
               <a:rPr lang="ko-KR" altLang="en-US" smtClean="0"/>
-              <a:t>2026-09-23</a:t>
+              <a:t>2026-09-29</a:t>
             </a:fld>
             <a:endParaRPr lang="ko-KR" altLang="en-US"/>
           </a:p>
@@ -4839,7 +4839,7 @@
           <a:p>
             <a:fld id="{5CC5944E-0BC8-4FAA-9F94-6B4B05834E10}" type="datetime1">
               <a:rPr lang="ko-KR" altLang="en-US" smtClean="0"/>
-              <a:t>2026-09-23</a:t>
+              <a:t>2026-09-29</a:t>
             </a:fld>
             <a:endParaRPr lang="ko-KR" altLang="en-US"/>
           </a:p>
@@ -11515,6 +11515,41 @@
               <a:t>석탄 시장</a:t>
             </a:r>
             <a:endParaRPr lang="ko-KR" altLang="en-US" sz="3600" i="0" spc="150" dirty="0"/>
+          </a:p>
+        </p:txBody>
+      </p:sp>
+      <p:sp>
+        <p:nvSpPr>
+          <p:cNvPr id="3" name="TextBox 2">
+            <a:extLst>
+              <a:ext uri="{FF2B5EF4-FFF2-40B4-BE49-F238E27FC236}">
+                <a16:creationId xmlns:a16="http://schemas.microsoft.com/office/drawing/2014/main" id="{14E72777-91B1-E903-CA66-1C319C506ED3}"/>
+              </a:ext>
+            </a:extLst>
+          </p:cNvPr>
+          <p:cNvSpPr txBox="1"/>
+          <p:nvPr/>
+        </p:nvSpPr>
+        <p:spPr>
+          <a:xfrm>
+            <a:off x="3143250" y="1197508"/>
+            <a:ext cx="6096000" cy="369332"/>
+          </a:xfrm>
+          <a:prstGeom prst="rect">
+            <a:avLst/>
+          </a:prstGeom>
+          <a:noFill/>
+        </p:spPr>
+        <p:txBody>
+          <a:bodyPr wrap="square">
+            <a:spAutoFit/>
+          </a:bodyPr>
+          <a:lstStyle/>
+          <a:p>
+            <a:r>
+              <a:rPr lang="ko-KR" altLang="en-US" dirty="0"/>
+              <a:t>https://youtu.be/EfXCVfnWyWk?si=16SJhThLYQvx8WDP</a:t>
+            </a:r>
           </a:p>
         </p:txBody>
       </p:sp>
